--- a/Stage2-C++-Advanced/Files/2788-Files.pptx
+++ b/Stage2-C++-Advanced/Files/2788-Files.pptx
@@ -125,768 +125,68 @@
 </p:presentation>
 </file>
 
-<file path=ppt/revisionInfo.xml><?xml version="1.0" encoding="utf-8"?>
-<p1510:revInfo xmlns:a="http://schemas.openxmlformats.org/drawingml/2006/main" xmlns:r="http://schemas.openxmlformats.org/officeDocument/2006/relationships" xmlns:p1510="http://schemas.microsoft.com/office/powerpoint/2015/10/main">
-  <p1510:revLst>
-    <p1510:client id="{CF93AE3E-658B-4BA8-B207-271070D0A60B}" v="12" dt="2025-11-19T08:38:14.174"/>
-  </p1510:revLst>
-</p1510:revInfo>
-</file>
-
 <file path=ppt/changesInfos/changesInfo1.xml><?xml version="1.0" encoding="utf-8"?>
 <pc:chgInfo xmlns:a="http://schemas.openxmlformats.org/drawingml/2006/main" xmlns:r="http://schemas.openxmlformats.org/officeDocument/2006/relationships" xmlns:ac="http://schemas.microsoft.com/office/drawing/2013/main/command" xmlns:pc="http://schemas.microsoft.com/office/powerpoint/2013/main/command">
   <pc:docChgLst>
-    <pc:chgData name="Bryan Sun" userId="851caa7714272873" providerId="LiveId" clId="{1A8111D1-4A65-4A29-9DEE-6B0D34390FD8}"/>
-    <pc:docChg chg="modSld">
-      <pc:chgData name="Bryan Sun" userId="851caa7714272873" providerId="LiveId" clId="{1A8111D1-4A65-4A29-9DEE-6B0D34390FD8}" dt="2025-11-19T08:38:14.173" v="14"/>
+    <pc:chgData name="Bryan Sun" userId="851caa7714272873" providerId="LiveId" clId="{9CD94D5E-0A18-4CEF-A655-0E4C15651F93}"/>
+    <pc:docChg chg="custSel modSld">
+      <pc:chgData name="Bryan Sun" userId="851caa7714272873" providerId="LiveId" clId="{9CD94D5E-0A18-4CEF-A655-0E4C15651F93}" dt="2026-10-18T03:47:12.635" v="0" actId="7634"/>
       <pc:docMkLst>
         <pc:docMk/>
       </pc:docMkLst>
-      <pc:sldChg chg="modSp mod">
-        <pc:chgData name="Bryan Sun" userId="851caa7714272873" providerId="LiveId" clId="{1A8111D1-4A65-4A29-9DEE-6B0D34390FD8}" dt="2025-11-19T08:38:14.173" v="14"/>
-        <pc:sldMkLst>
-          <pc:docMk/>
-          <pc:sldMk cId="2397196102" sldId="363"/>
-        </pc:sldMkLst>
-        <pc:spChg chg="mod">
-          <ac:chgData name="Bryan Sun" userId="851caa7714272873" providerId="LiveId" clId="{1A8111D1-4A65-4A29-9DEE-6B0D34390FD8}" dt="2025-11-19T08:38:14.173" v="14"/>
-          <ac:spMkLst>
-            <pc:docMk/>
-            <pc:sldMk cId="2397196102" sldId="363"/>
-            <ac:spMk id="3" creationId="{364B6489-5513-4724-81F7-F874B8C60D21}"/>
-          </ac:spMkLst>
-        </pc:spChg>
-      </pc:sldChg>
-    </pc:docChg>
-  </pc:docChgLst>
-  <pc:docChgLst>
-    <pc:chgData name="Bryan Sun" userId="851caa7714272873" providerId="LiveId" clId="{1DF0C224-3A3E-55A6-A8D1-F8F2208D385B}"/>
-    <pc:docChg chg="undo redo custSel modSld">
-      <pc:chgData name="Bryan Sun" userId="851caa7714272873" providerId="LiveId" clId="{1DF0C224-3A3E-55A6-A8D1-F8F2208D385B}" dt="2025-11-16T11:55:25.641" v="2162" actId="20577"/>
-      <pc:docMkLst>
-        <pc:docMk/>
-      </pc:docMkLst>
-      <pc:sldChg chg="modSp mod">
-        <pc:chgData name="Bryan Sun" userId="851caa7714272873" providerId="LiveId" clId="{1DF0C224-3A3E-55A6-A8D1-F8F2208D385B}" dt="2025-10-22T12:02:45.195" v="25" actId="404"/>
-        <pc:sldMkLst>
-          <pc:docMk/>
-          <pc:sldMk cId="806275777" sldId="256"/>
-        </pc:sldMkLst>
-        <pc:spChg chg="mod">
-          <ac:chgData name="Bryan Sun" userId="851caa7714272873" providerId="LiveId" clId="{1DF0C224-3A3E-55A6-A8D1-F8F2208D385B}" dt="2025-10-22T12:01:51.593" v="8" actId="20577"/>
-          <ac:spMkLst>
-            <pc:docMk/>
-            <pc:sldMk cId="806275777" sldId="256"/>
-            <ac:spMk id="3" creationId="{00000000-0000-0000-0000-000000000000}"/>
-          </ac:spMkLst>
-        </pc:spChg>
-        <pc:spChg chg="mod">
-          <ac:chgData name="Bryan Sun" userId="851caa7714272873" providerId="LiveId" clId="{1DF0C224-3A3E-55A6-A8D1-F8F2208D385B}" dt="2025-10-22T12:02:45.195" v="25" actId="404"/>
-          <ac:spMkLst>
-            <pc:docMk/>
-            <pc:sldMk cId="806275777" sldId="256"/>
-            <ac:spMk id="4" creationId="{00000000-0000-0000-0000-000000000000}"/>
-          </ac:spMkLst>
-        </pc:spChg>
-      </pc:sldChg>
-      <pc:sldChg chg="addSp delSp modSp mod modAnim">
-        <pc:chgData name="Bryan Sun" userId="851caa7714272873" providerId="LiveId" clId="{1DF0C224-3A3E-55A6-A8D1-F8F2208D385B}" dt="2025-11-07T05:04:19.159" v="1880" actId="478"/>
-        <pc:sldMkLst>
-          <pc:docMk/>
-          <pc:sldMk cId="1727142192" sldId="341"/>
-        </pc:sldMkLst>
-        <pc:spChg chg="add mod">
-          <ac:chgData name="Bryan Sun" userId="851caa7714272873" providerId="LiveId" clId="{1DF0C224-3A3E-55A6-A8D1-F8F2208D385B}" dt="2025-10-25T12:15:36.385" v="917" actId="122"/>
-          <ac:spMkLst>
-            <pc:docMk/>
-            <pc:sldMk cId="1727142192" sldId="341"/>
-            <ac:spMk id="2" creationId="{DA564990-1491-4713-F56B-597FDA81C5E1}"/>
-          </ac:spMkLst>
-        </pc:spChg>
-        <pc:spChg chg="mod">
-          <ac:chgData name="Bryan Sun" userId="851caa7714272873" providerId="LiveId" clId="{1DF0C224-3A3E-55A6-A8D1-F8F2208D385B}" dt="2025-10-25T22:39:21.168" v="1230" actId="20577"/>
-          <ac:spMkLst>
-            <pc:docMk/>
-            <pc:sldMk cId="1727142192" sldId="341"/>
-            <ac:spMk id="3" creationId="{364B6489-5513-4724-81F7-F874B8C60D21}"/>
-          </ac:spMkLst>
-        </pc:spChg>
-        <pc:spChg chg="mod">
-          <ac:chgData name="Bryan Sun" userId="851caa7714272873" providerId="LiveId" clId="{1DF0C224-3A3E-55A6-A8D1-F8F2208D385B}" dt="2025-10-25T12:17:21.153" v="968" actId="20577"/>
-          <ac:spMkLst>
-            <pc:docMk/>
-            <pc:sldMk cId="1727142192" sldId="341"/>
-            <ac:spMk id="5" creationId="{B9C26A64-B8C3-4EFC-9CD7-58C7C9B5398D}"/>
-          </ac:spMkLst>
-        </pc:spChg>
-        <pc:spChg chg="mod">
-          <ac:chgData name="Bryan Sun" userId="851caa7714272873" providerId="LiveId" clId="{1DF0C224-3A3E-55A6-A8D1-F8F2208D385B}" dt="2025-10-25T22:38:27.989" v="1213" actId="1076"/>
-          <ac:spMkLst>
-            <pc:docMk/>
-            <pc:sldMk cId="1727142192" sldId="341"/>
-            <ac:spMk id="6" creationId="{81D45D1A-C10D-44EF-B3FF-5D6E46805401}"/>
-          </ac:spMkLst>
-        </pc:spChg>
-        <pc:spChg chg="mod">
-          <ac:chgData name="Bryan Sun" userId="851caa7714272873" providerId="LiveId" clId="{1DF0C224-3A3E-55A6-A8D1-F8F2208D385B}" dt="2025-10-22T12:01:14.906" v="3" actId="2711"/>
-          <ac:spMkLst>
-            <pc:docMk/>
-            <pc:sldMk cId="1727142192" sldId="341"/>
-            <ac:spMk id="7" creationId="{F8D2572B-AD75-4860-89AD-27D193E42FAE}"/>
-          </ac:spMkLst>
-        </pc:spChg>
-        <pc:spChg chg="add mod">
-          <ac:chgData name="Bryan Sun" userId="851caa7714272873" providerId="LiveId" clId="{1DF0C224-3A3E-55A6-A8D1-F8F2208D385B}" dt="2025-11-07T05:04:13.244" v="1879" actId="20577"/>
-          <ac:spMkLst>
-            <pc:docMk/>
-            <pc:sldMk cId="1727142192" sldId="341"/>
-            <ac:spMk id="9" creationId="{46E3B0CE-7C9F-4090-622A-24E6DC851CD9}"/>
-          </ac:spMkLst>
-        </pc:spChg>
-        <pc:picChg chg="mod">
-          <ac:chgData name="Bryan Sun" userId="851caa7714272873" providerId="LiveId" clId="{1DF0C224-3A3E-55A6-A8D1-F8F2208D385B}" dt="2025-10-22T12:01:14.906" v="3" actId="2711"/>
-          <ac:picMkLst>
-            <pc:docMk/>
-            <pc:sldMk cId="1727142192" sldId="341"/>
-            <ac:picMk id="4" creationId="{DA7F137E-29E8-EF4E-B734-7F2194BC324F}"/>
-          </ac:picMkLst>
-        </pc:picChg>
-      </pc:sldChg>
-      <pc:sldChg chg="modSp mod modAnim">
-        <pc:chgData name="Bryan Sun" userId="851caa7714272873" providerId="LiveId" clId="{1DF0C224-3A3E-55A6-A8D1-F8F2208D385B}" dt="2025-11-16T11:50:53.662" v="1951" actId="20577"/>
+      <pc:sldChg chg="addSp mod">
+        <pc:chgData name="Bryan Sun" userId="851caa7714272873" providerId="LiveId" clId="{9CD94D5E-0A18-4CEF-A655-0E4C15651F93}" dt="2026-10-18T03:47:12.635" v="0" actId="7634"/>
         <pc:sldMkLst>
           <pc:docMk/>
           <pc:sldMk cId="815367437" sldId="342"/>
         </pc:sldMkLst>
-        <pc:spChg chg="mod">
-          <ac:chgData name="Bryan Sun" userId="851caa7714272873" providerId="LiveId" clId="{1DF0C224-3A3E-55A6-A8D1-F8F2208D385B}" dt="2025-10-25T12:20:22.837" v="1027" actId="2711"/>
-          <ac:spMkLst>
+        <pc:inkChg chg="add">
+          <ac:chgData name="Bryan Sun" userId="851caa7714272873" providerId="LiveId" clId="{9CD94D5E-0A18-4CEF-A655-0E4C15651F93}" dt="2026-10-18T03:47:12.635" v="0" actId="7634"/>
+          <ac:inkMkLst>
             <pc:docMk/>
             <pc:sldMk cId="815367437" sldId="342"/>
-            <ac:spMk id="3" creationId="{364B6489-5513-4724-81F7-F874B8C60D21}"/>
-          </ac:spMkLst>
-        </pc:spChg>
-        <pc:spChg chg="mod">
-          <ac:chgData name="Bryan Sun" userId="851caa7714272873" providerId="LiveId" clId="{1DF0C224-3A3E-55A6-A8D1-F8F2208D385B}" dt="2025-11-16T11:50:53.662" v="1951" actId="20577"/>
-          <ac:spMkLst>
-            <pc:docMk/>
-            <pc:sldMk cId="815367437" sldId="342"/>
-            <ac:spMk id="4" creationId="{97818D57-704A-0241-80FE-088934D28197}"/>
-          </ac:spMkLst>
-        </pc:spChg>
-        <pc:spChg chg="mod">
-          <ac:chgData name="Bryan Sun" userId="851caa7714272873" providerId="LiveId" clId="{1DF0C224-3A3E-55A6-A8D1-F8F2208D385B}" dt="2025-10-25T12:20:22.837" v="1027" actId="2711"/>
-          <ac:spMkLst>
-            <pc:docMk/>
-            <pc:sldMk cId="815367437" sldId="342"/>
-            <ac:spMk id="5" creationId="{D7E9B2F5-5E83-4801-AC6B-47AF1488A3C7}"/>
-          </ac:spMkLst>
-        </pc:spChg>
-        <pc:spChg chg="mod">
-          <ac:chgData name="Bryan Sun" userId="851caa7714272873" providerId="LiveId" clId="{1DF0C224-3A3E-55A6-A8D1-F8F2208D385B}" dt="2025-10-25T12:20:22.837" v="1027" actId="2711"/>
-          <ac:spMkLst>
-            <pc:docMk/>
-            <pc:sldMk cId="815367437" sldId="342"/>
-            <ac:spMk id="6" creationId="{046000D9-01A6-4B4C-B87F-EB85D1EC06B9}"/>
-          </ac:spMkLst>
-        </pc:spChg>
-        <pc:spChg chg="mod">
-          <ac:chgData name="Bryan Sun" userId="851caa7714272873" providerId="LiveId" clId="{1DF0C224-3A3E-55A6-A8D1-F8F2208D385B}" dt="2025-10-25T22:49:22.550" v="1530" actId="20577"/>
-          <ac:spMkLst>
-            <pc:docMk/>
-            <pc:sldMk cId="815367437" sldId="342"/>
-            <ac:spMk id="8" creationId="{B89FE863-43B6-46F9-A6C5-F37F7D091190}"/>
-          </ac:spMkLst>
-        </pc:spChg>
-      </pc:sldChg>
-      <pc:sldChg chg="addSp delSp modSp mod modAnim">
-        <pc:chgData name="Bryan Sun" userId="851caa7714272873" providerId="LiveId" clId="{1DF0C224-3A3E-55A6-A8D1-F8F2208D385B}" dt="2025-11-07T05:05:47.268" v="1892"/>
-        <pc:sldMkLst>
-          <pc:docMk/>
-          <pc:sldMk cId="2939101759" sldId="348"/>
-        </pc:sldMkLst>
-        <pc:spChg chg="add mod">
-          <ac:chgData name="Bryan Sun" userId="851caa7714272873" providerId="LiveId" clId="{1DF0C224-3A3E-55A6-A8D1-F8F2208D385B}" dt="2025-10-25T22:46:21.826" v="1384" actId="1038"/>
-          <ac:spMkLst>
-            <pc:docMk/>
-            <pc:sldMk cId="2939101759" sldId="348"/>
-            <ac:spMk id="2" creationId="{A3B4DA47-3863-1338-D36B-2BB1B2E92622}"/>
-          </ac:spMkLst>
-        </pc:spChg>
-        <pc:spChg chg="mod">
-          <ac:chgData name="Bryan Sun" userId="851caa7714272873" providerId="LiveId" clId="{1DF0C224-3A3E-55A6-A8D1-F8F2208D385B}" dt="2025-10-22T12:08:20.979" v="201" actId="20577"/>
-          <ac:spMkLst>
-            <pc:docMk/>
-            <pc:sldMk cId="2939101759" sldId="348"/>
-            <ac:spMk id="3" creationId="{364B6489-5513-4724-81F7-F874B8C60D21}"/>
-          </ac:spMkLst>
-        </pc:spChg>
-        <pc:spChg chg="add mod">
-          <ac:chgData name="Bryan Sun" userId="851caa7714272873" providerId="LiveId" clId="{1DF0C224-3A3E-55A6-A8D1-F8F2208D385B}" dt="2025-10-25T22:47:13.909" v="1405" actId="1038"/>
-          <ac:spMkLst>
-            <pc:docMk/>
-            <pc:sldMk cId="2939101759" sldId="348"/>
-            <ac:spMk id="5" creationId="{2AEF951F-4462-152A-6622-A53BF236057B}"/>
-          </ac:spMkLst>
-        </pc:spChg>
-        <pc:spChg chg="mod">
-          <ac:chgData name="Bryan Sun" userId="851caa7714272873" providerId="LiveId" clId="{1DF0C224-3A3E-55A6-A8D1-F8F2208D385B}" dt="2025-10-22T12:04:13.016" v="28" actId="2711"/>
-          <ac:spMkLst>
-            <pc:docMk/>
-            <pc:sldMk cId="2939101759" sldId="348"/>
-            <ac:spMk id="6" creationId="{D7708649-DEC0-EF42-8A7C-7E9406DFF0D7}"/>
-          </ac:spMkLst>
-        </pc:spChg>
-        <pc:spChg chg="mod">
-          <ac:chgData name="Bryan Sun" userId="851caa7714272873" providerId="LiveId" clId="{1DF0C224-3A3E-55A6-A8D1-F8F2208D385B}" dt="2025-10-25T12:19:56.122" v="1025" actId="20577"/>
-          <ac:spMkLst>
-            <pc:docMk/>
-            <pc:sldMk cId="2939101759" sldId="348"/>
-            <ac:spMk id="7" creationId="{DDD1ECFD-9032-458B-8BD2-DCB9D428D01A}"/>
-          </ac:spMkLst>
-        </pc:spChg>
-        <pc:spChg chg="mod">
-          <ac:chgData name="Bryan Sun" userId="851caa7714272873" providerId="LiveId" clId="{1DF0C224-3A3E-55A6-A8D1-F8F2208D385B}" dt="2025-10-22T12:07:58.157" v="178" actId="20577"/>
-          <ac:spMkLst>
-            <pc:docMk/>
-            <pc:sldMk cId="2939101759" sldId="348"/>
-            <ac:spMk id="8" creationId="{B837DCD0-A54A-42A2-B30E-D8A89642C564}"/>
-          </ac:spMkLst>
-        </pc:spChg>
-        <pc:spChg chg="mod">
-          <ac:chgData name="Bryan Sun" userId="851caa7714272873" providerId="LiveId" clId="{1DF0C224-3A3E-55A6-A8D1-F8F2208D385B}" dt="2025-10-22T12:04:22.770" v="41" actId="20577"/>
-          <ac:spMkLst>
-            <pc:docMk/>
-            <pc:sldMk cId="2939101759" sldId="348"/>
-            <ac:spMk id="9" creationId="{EB5FCF6F-A941-4B44-B194-1E6B086551E6}"/>
-          </ac:spMkLst>
-        </pc:spChg>
-        <pc:spChg chg="add mod">
-          <ac:chgData name="Bryan Sun" userId="851caa7714272873" providerId="LiveId" clId="{1DF0C224-3A3E-55A6-A8D1-F8F2208D385B}" dt="2025-10-25T22:43:31.934" v="1322" actId="1036"/>
-          <ac:spMkLst>
-            <pc:docMk/>
-            <pc:sldMk cId="2939101759" sldId="348"/>
-            <ac:spMk id="11" creationId="{E1CF7DC3-84FB-E6CA-6419-7B98D4FB12B7}"/>
-          </ac:spMkLst>
-        </pc:spChg>
-        <pc:spChg chg="add mod">
-          <ac:chgData name="Bryan Sun" userId="851caa7714272873" providerId="LiveId" clId="{1DF0C224-3A3E-55A6-A8D1-F8F2208D385B}" dt="2025-10-25T22:45:04.071" v="1366" actId="14100"/>
-          <ac:spMkLst>
-            <pc:docMk/>
-            <pc:sldMk cId="2939101759" sldId="348"/>
-            <ac:spMk id="12" creationId="{8DD63FE0-AFEE-1588-01E6-873595634A57}"/>
-          </ac:spMkLst>
-        </pc:spChg>
-        <pc:spChg chg="add mod">
-          <ac:chgData name="Bryan Sun" userId="851caa7714272873" providerId="LiveId" clId="{1DF0C224-3A3E-55A6-A8D1-F8F2208D385B}" dt="2025-10-25T22:47:38.548" v="1436" actId="14100"/>
-          <ac:spMkLst>
-            <pc:docMk/>
-            <pc:sldMk cId="2939101759" sldId="348"/>
-            <ac:spMk id="14" creationId="{3B05468F-237E-B3E8-A3BF-BA2A273F2AA5}"/>
-          </ac:spMkLst>
-        </pc:spChg>
-        <pc:spChg chg="add mod">
-          <ac:chgData name="Bryan Sun" userId="851caa7714272873" providerId="LiveId" clId="{1DF0C224-3A3E-55A6-A8D1-F8F2208D385B}" dt="2025-10-25T22:47:55.478" v="1457" actId="20577"/>
-          <ac:spMkLst>
-            <pc:docMk/>
-            <pc:sldMk cId="2939101759" sldId="348"/>
-            <ac:spMk id="15" creationId="{9A80D037-DCDD-E932-5B63-9BF541A96091}"/>
-          </ac:spMkLst>
-        </pc:spChg>
-        <pc:spChg chg="add mod">
-          <ac:chgData name="Bryan Sun" userId="851caa7714272873" providerId="LiveId" clId="{1DF0C224-3A3E-55A6-A8D1-F8F2208D385B}" dt="2025-10-25T22:48:15.248" v="1470" actId="14100"/>
-          <ac:spMkLst>
-            <pc:docMk/>
-            <pc:sldMk cId="2939101759" sldId="348"/>
-            <ac:spMk id="16" creationId="{A4CD47B6-376B-D83F-6A03-257499060C35}"/>
-          </ac:spMkLst>
-        </pc:spChg>
-        <pc:spChg chg="add mod">
-          <ac:chgData name="Bryan Sun" userId="851caa7714272873" providerId="LiveId" clId="{1DF0C224-3A3E-55A6-A8D1-F8F2208D385B}" dt="2025-10-25T22:48:29.983" v="1492" actId="20577"/>
-          <ac:spMkLst>
-            <pc:docMk/>
-            <pc:sldMk cId="2939101759" sldId="348"/>
-            <ac:spMk id="17" creationId="{D7B5B9A2-5F99-96E2-014B-064FCD3DB7BF}"/>
-          </ac:spMkLst>
-        </pc:spChg>
-        <pc:spChg chg="add mod">
-          <ac:chgData name="Bryan Sun" userId="851caa7714272873" providerId="LiveId" clId="{1DF0C224-3A3E-55A6-A8D1-F8F2208D385B}" dt="2025-10-25T22:48:43.505" v="1505" actId="14100"/>
-          <ac:spMkLst>
-            <pc:docMk/>
-            <pc:sldMk cId="2939101759" sldId="348"/>
-            <ac:spMk id="18" creationId="{14E6FD83-3FE5-D06F-820F-F4503C4E1358}"/>
-          </ac:spMkLst>
-        </pc:spChg>
-        <pc:spChg chg="add mod">
-          <ac:chgData name="Bryan Sun" userId="851caa7714272873" providerId="LiveId" clId="{1DF0C224-3A3E-55A6-A8D1-F8F2208D385B}" dt="2025-10-25T22:49:02.326" v="1529" actId="20577"/>
-          <ac:spMkLst>
-            <pc:docMk/>
-            <pc:sldMk cId="2939101759" sldId="348"/>
-            <ac:spMk id="19" creationId="{6E87E23A-2634-9687-4E82-EDB9E23D398F}"/>
-          </ac:spMkLst>
-        </pc:spChg>
-        <pc:picChg chg="mod">
-          <ac:chgData name="Bryan Sun" userId="851caa7714272873" providerId="LiveId" clId="{1DF0C224-3A3E-55A6-A8D1-F8F2208D385B}" dt="2025-10-25T12:18:54.432" v="1001" actId="14100"/>
-          <ac:picMkLst>
-            <pc:docMk/>
-            <pc:sldMk cId="2939101759" sldId="348"/>
-            <ac:picMk id="4" creationId="{F0571A0C-0097-9245-8D14-CDA367B59387}"/>
-          </ac:picMkLst>
-        </pc:picChg>
-      </pc:sldChg>
-      <pc:sldChg chg="modSp mod">
-        <pc:chgData name="Bryan Sun" userId="851caa7714272873" providerId="LiveId" clId="{1DF0C224-3A3E-55A6-A8D1-F8F2208D385B}" dt="2025-11-16T11:50:04.275" v="1930" actId="20577"/>
-        <pc:sldMkLst>
-          <pc:docMk/>
-          <pc:sldMk cId="3700357046" sldId="350"/>
-        </pc:sldMkLst>
-        <pc:spChg chg="mod">
-          <ac:chgData name="Bryan Sun" userId="851caa7714272873" providerId="LiveId" clId="{1DF0C224-3A3E-55A6-A8D1-F8F2208D385B}" dt="2025-10-22T12:15:52.400" v="474" actId="14100"/>
-          <ac:spMkLst>
-            <pc:docMk/>
-            <pc:sldMk cId="3700357046" sldId="350"/>
-            <ac:spMk id="2" creationId="{1D1BA237-D01A-4A66-A279-E97CB1109157}"/>
-          </ac:spMkLst>
-        </pc:spChg>
-        <pc:spChg chg="mod">
-          <ac:chgData name="Bryan Sun" userId="851caa7714272873" providerId="LiveId" clId="{1DF0C224-3A3E-55A6-A8D1-F8F2208D385B}" dt="2025-10-25T12:22:15.894" v="1044" actId="20577"/>
-          <ac:spMkLst>
-            <pc:docMk/>
-            <pc:sldMk cId="3700357046" sldId="350"/>
-            <ac:spMk id="3" creationId="{364B6489-5513-4724-81F7-F874B8C60D21}"/>
-          </ac:spMkLst>
-        </pc:spChg>
-        <pc:spChg chg="mod">
-          <ac:chgData name="Bryan Sun" userId="851caa7714272873" providerId="LiveId" clId="{1DF0C224-3A3E-55A6-A8D1-F8F2208D385B}" dt="2025-11-16T11:49:03.366" v="1903" actId="20577"/>
-          <ac:spMkLst>
-            <pc:docMk/>
-            <pc:sldMk cId="3700357046" sldId="350"/>
-            <ac:spMk id="4" creationId="{97818D57-704A-0241-80FE-088934D28197}"/>
-          </ac:spMkLst>
-        </pc:spChg>
-        <pc:spChg chg="mod">
-          <ac:chgData name="Bryan Sun" userId="851caa7714272873" providerId="LiveId" clId="{1DF0C224-3A3E-55A6-A8D1-F8F2208D385B}" dt="2025-10-22T12:11:52.322" v="338" actId="6549"/>
-          <ac:spMkLst>
-            <pc:docMk/>
-            <pc:sldMk cId="3700357046" sldId="350"/>
-            <ac:spMk id="8" creationId="{415A9BD6-13F6-4E48-996E-23FEEBCBCDD1}"/>
-          </ac:spMkLst>
-        </pc:spChg>
-        <pc:spChg chg="mod">
-          <ac:chgData name="Bryan Sun" userId="851caa7714272873" providerId="LiveId" clId="{1DF0C224-3A3E-55A6-A8D1-F8F2208D385B}" dt="2025-11-16T11:49:09.220" v="1904" actId="1076"/>
-          <ac:spMkLst>
-            <pc:docMk/>
-            <pc:sldMk cId="3700357046" sldId="350"/>
-            <ac:spMk id="9" creationId="{AFC76F8A-55A3-45B0-9CF4-82DC97808144}"/>
-          </ac:spMkLst>
-        </pc:spChg>
-        <pc:spChg chg="mod">
-          <ac:chgData name="Bryan Sun" userId="851caa7714272873" providerId="LiveId" clId="{1DF0C224-3A3E-55A6-A8D1-F8F2208D385B}" dt="2025-11-16T11:50:04.275" v="1930" actId="20577"/>
-          <ac:spMkLst>
-            <pc:docMk/>
-            <pc:sldMk cId="3700357046" sldId="350"/>
-            <ac:spMk id="10" creationId="{F0F380DD-D448-404F-A3E3-CE1D37FE23F6}"/>
-          </ac:spMkLst>
-        </pc:spChg>
-        <pc:spChg chg="mod">
-          <ac:chgData name="Bryan Sun" userId="851caa7714272873" providerId="LiveId" clId="{1DF0C224-3A3E-55A6-A8D1-F8F2208D385B}" dt="2025-11-16T11:49:45.739" v="1926" actId="1038"/>
-          <ac:spMkLst>
-            <pc:docMk/>
-            <pc:sldMk cId="3700357046" sldId="350"/>
-            <ac:spMk id="11" creationId="{839FA345-F5E4-4D8B-B32C-7822C2FE0C81}"/>
-          </ac:spMkLst>
-        </pc:spChg>
-        <pc:spChg chg="mod">
-          <ac:chgData name="Bryan Sun" userId="851caa7714272873" providerId="LiveId" clId="{1DF0C224-3A3E-55A6-A8D1-F8F2208D385B}" dt="2025-10-22T12:48:38.921" v="610" actId="6549"/>
-          <ac:spMkLst>
-            <pc:docMk/>
-            <pc:sldMk cId="3700357046" sldId="350"/>
-            <ac:spMk id="12" creationId="{8720A0B2-5E54-426E-BA5F-741AA25B6912}"/>
-          </ac:spMkLst>
-        </pc:spChg>
-      </pc:sldChg>
-      <pc:sldChg chg="modSp mod">
-        <pc:chgData name="Bryan Sun" userId="851caa7714272873" providerId="LiveId" clId="{1DF0C224-3A3E-55A6-A8D1-F8F2208D385B}" dt="2025-11-16T11:51:12.376" v="1952" actId="20577"/>
-        <pc:sldMkLst>
-          <pc:docMk/>
-          <pc:sldMk cId="388973949" sldId="352"/>
-        </pc:sldMkLst>
-        <pc:spChg chg="mod">
-          <ac:chgData name="Bryan Sun" userId="851caa7714272873" providerId="LiveId" clId="{1DF0C224-3A3E-55A6-A8D1-F8F2208D385B}" dt="2025-11-16T11:51:12.376" v="1952" actId="20577"/>
-          <ac:spMkLst>
-            <pc:docMk/>
-            <pc:sldMk cId="388973949" sldId="352"/>
-            <ac:spMk id="4" creationId="{97818D57-704A-0241-80FE-088934D28197}"/>
-          </ac:spMkLst>
-        </pc:spChg>
-        <pc:spChg chg="mod">
-          <ac:chgData name="Bryan Sun" userId="851caa7714272873" providerId="LiveId" clId="{1DF0C224-3A3E-55A6-A8D1-F8F2208D385B}" dt="2025-10-22T12:49:35.596" v="695" actId="2711"/>
-          <ac:spMkLst>
-            <pc:docMk/>
-            <pc:sldMk cId="388973949" sldId="352"/>
-            <ac:spMk id="6" creationId="{A17A7BA5-DD68-453A-87DA-B554E57B6390}"/>
-          </ac:spMkLst>
-        </pc:spChg>
-        <pc:spChg chg="mod">
-          <ac:chgData name="Bryan Sun" userId="851caa7714272873" providerId="LiveId" clId="{1DF0C224-3A3E-55A6-A8D1-F8F2208D385B}" dt="2025-10-22T12:49:35.596" v="695" actId="2711"/>
-          <ac:spMkLst>
-            <pc:docMk/>
-            <pc:sldMk cId="388973949" sldId="352"/>
-            <ac:spMk id="7" creationId="{3A37A4E5-E4F4-4B66-9AFA-DDE359B2C7AA}"/>
-          </ac:spMkLst>
-        </pc:spChg>
-        <pc:spChg chg="mod">
-          <ac:chgData name="Bryan Sun" userId="851caa7714272873" providerId="LiveId" clId="{1DF0C224-3A3E-55A6-A8D1-F8F2208D385B}" dt="2025-10-22T12:49:35.596" v="695" actId="2711"/>
-          <ac:spMkLst>
-            <pc:docMk/>
-            <pc:sldMk cId="388973949" sldId="352"/>
-            <ac:spMk id="8" creationId="{F1916FA0-E7B0-4AC2-9584-EAB00885D1B6}"/>
-          </ac:spMkLst>
-        </pc:spChg>
-        <pc:spChg chg="mod">
-          <ac:chgData name="Bryan Sun" userId="851caa7714272873" providerId="LiveId" clId="{1DF0C224-3A3E-55A6-A8D1-F8F2208D385B}" dt="2025-10-22T12:49:35.596" v="695" actId="2711"/>
-          <ac:spMkLst>
-            <pc:docMk/>
-            <pc:sldMk cId="388973949" sldId="352"/>
-            <ac:spMk id="9" creationId="{8E7A2DE0-716A-489F-B4F8-0E4BDA36C824}"/>
-          </ac:spMkLst>
-        </pc:spChg>
-        <pc:spChg chg="mod">
-          <ac:chgData name="Bryan Sun" userId="851caa7714272873" providerId="LiveId" clId="{1DF0C224-3A3E-55A6-A8D1-F8F2208D385B}" dt="2025-10-22T12:49:35.596" v="695" actId="2711"/>
-          <ac:spMkLst>
-            <pc:docMk/>
-            <pc:sldMk cId="388973949" sldId="352"/>
-            <ac:spMk id="10" creationId="{1FCC0108-8476-4074-A068-E671A242BCC9}"/>
-          </ac:spMkLst>
-        </pc:spChg>
-        <pc:spChg chg="mod">
-          <ac:chgData name="Bryan Sun" userId="851caa7714272873" providerId="LiveId" clId="{1DF0C224-3A3E-55A6-A8D1-F8F2208D385B}" dt="2025-10-25T12:27:47.796" v="1212" actId="1076"/>
-          <ac:spMkLst>
-            <pc:docMk/>
-            <pc:sldMk cId="388973949" sldId="352"/>
-            <ac:spMk id="11" creationId="{EE370EA7-1CCF-409E-A70C-E4408967BF20}"/>
-          </ac:spMkLst>
-        </pc:spChg>
-        <pc:spChg chg="mod">
-          <ac:chgData name="Bryan Sun" userId="851caa7714272873" providerId="LiveId" clId="{1DF0C224-3A3E-55A6-A8D1-F8F2208D385B}" dt="2025-10-25T12:27:38.673" v="1211" actId="20577"/>
-          <ac:spMkLst>
-            <pc:docMk/>
-            <pc:sldMk cId="388973949" sldId="352"/>
-            <ac:spMk id="12" creationId="{7EFAFDE7-4907-4007-A872-DE014AD7C72C}"/>
-          </ac:spMkLst>
-        </pc:spChg>
-        <pc:spChg chg="mod">
-          <ac:chgData name="Bryan Sun" userId="851caa7714272873" providerId="LiveId" clId="{1DF0C224-3A3E-55A6-A8D1-F8F2208D385B}" dt="2025-10-25T12:25:53.302" v="1164" actId="20577"/>
-          <ac:spMkLst>
-            <pc:docMk/>
-            <pc:sldMk cId="388973949" sldId="352"/>
-            <ac:spMk id="13" creationId="{BC410E82-4F63-43E6-B111-51EC3A1D7E54}"/>
-          </ac:spMkLst>
-        </pc:spChg>
-        <pc:spChg chg="mod">
-          <ac:chgData name="Bryan Sun" userId="851caa7714272873" providerId="LiveId" clId="{1DF0C224-3A3E-55A6-A8D1-F8F2208D385B}" dt="2025-10-25T12:23:59.194" v="1088" actId="14100"/>
-          <ac:spMkLst>
-            <pc:docMk/>
-            <pc:sldMk cId="388973949" sldId="352"/>
-            <ac:spMk id="15" creationId="{341275F3-BFEF-4E7D-866D-994FA1BE688A}"/>
-          </ac:spMkLst>
-        </pc:spChg>
-        <pc:spChg chg="mod">
-          <ac:chgData name="Bryan Sun" userId="851caa7714272873" providerId="LiveId" clId="{1DF0C224-3A3E-55A6-A8D1-F8F2208D385B}" dt="2025-10-22T12:49:35.596" v="695" actId="2711"/>
-          <ac:spMkLst>
-            <pc:docMk/>
-            <pc:sldMk cId="388973949" sldId="352"/>
-            <ac:spMk id="17" creationId="{BEEDB99E-036B-43D2-9DF6-F68B3CDE944B}"/>
-          </ac:spMkLst>
-        </pc:spChg>
-      </pc:sldChg>
-      <pc:sldChg chg="modSp mod modAnim">
-        <pc:chgData name="Bryan Sun" userId="851caa7714272873" providerId="LiveId" clId="{1DF0C224-3A3E-55A6-A8D1-F8F2208D385B}" dt="2025-11-16T11:52:36.053" v="2033" actId="313"/>
-        <pc:sldMkLst>
-          <pc:docMk/>
-          <pc:sldMk cId="1886648737" sldId="357"/>
-        </pc:sldMkLst>
-        <pc:spChg chg="mod">
-          <ac:chgData name="Bryan Sun" userId="851caa7714272873" providerId="LiveId" clId="{1DF0C224-3A3E-55A6-A8D1-F8F2208D385B}" dt="2025-10-25T23:03:46.865" v="1540" actId="403"/>
-          <ac:spMkLst>
-            <pc:docMk/>
-            <pc:sldMk cId="1886648737" sldId="357"/>
-            <ac:spMk id="3" creationId="{364B6489-5513-4724-81F7-F874B8C60D21}"/>
-          </ac:spMkLst>
-        </pc:spChg>
-        <pc:spChg chg="mod">
-          <ac:chgData name="Bryan Sun" userId="851caa7714272873" providerId="LiveId" clId="{1DF0C224-3A3E-55A6-A8D1-F8F2208D385B}" dt="2025-11-16T11:51:52.769" v="1981" actId="20577"/>
-          <ac:spMkLst>
-            <pc:docMk/>
-            <pc:sldMk cId="1886648737" sldId="357"/>
-            <ac:spMk id="5" creationId="{C3F17249-D53C-47A8-B826-917DD9CC2DD4}"/>
-          </ac:spMkLst>
-        </pc:spChg>
-        <pc:spChg chg="mod">
-          <ac:chgData name="Bryan Sun" userId="851caa7714272873" providerId="LiveId" clId="{1DF0C224-3A3E-55A6-A8D1-F8F2208D385B}" dt="2025-10-23T09:22:52.712" v="697" actId="2711"/>
-          <ac:spMkLst>
-            <pc:docMk/>
-            <pc:sldMk cId="1886648737" sldId="357"/>
-            <ac:spMk id="6" creationId="{C4C11EBB-30EF-4594-9387-559F4CC41681}"/>
-          </ac:spMkLst>
-        </pc:spChg>
-        <pc:spChg chg="mod">
-          <ac:chgData name="Bryan Sun" userId="851caa7714272873" providerId="LiveId" clId="{1DF0C224-3A3E-55A6-A8D1-F8F2208D385B}" dt="2025-10-23T09:22:52.712" v="697" actId="2711"/>
-          <ac:spMkLst>
-            <pc:docMk/>
-            <pc:sldMk cId="1886648737" sldId="357"/>
-            <ac:spMk id="7" creationId="{2692465D-1F1A-4FD6-83A5-6DFC3A56F665}"/>
-          </ac:spMkLst>
-        </pc:spChg>
-        <pc:spChg chg="mod">
-          <ac:chgData name="Bryan Sun" userId="851caa7714272873" providerId="LiveId" clId="{1DF0C224-3A3E-55A6-A8D1-F8F2208D385B}" dt="2025-10-25T23:07:38.646" v="1618" actId="1076"/>
-          <ac:spMkLst>
-            <pc:docMk/>
-            <pc:sldMk cId="1886648737" sldId="357"/>
-            <ac:spMk id="8" creationId="{C24673F8-181F-4599-99CD-705D6EA9F9E6}"/>
-          </ac:spMkLst>
-        </pc:spChg>
-        <pc:spChg chg="mod">
-          <ac:chgData name="Bryan Sun" userId="851caa7714272873" providerId="LiveId" clId="{1DF0C224-3A3E-55A6-A8D1-F8F2208D385B}" dt="2025-10-25T23:07:24.338" v="1616" actId="20577"/>
-          <ac:spMkLst>
-            <pc:docMk/>
-            <pc:sldMk cId="1886648737" sldId="357"/>
-            <ac:spMk id="9" creationId="{904FE3F8-3E65-42EC-8F47-56FB5111DDC8}"/>
-          </ac:spMkLst>
-        </pc:spChg>
-        <pc:spChg chg="mod">
-          <ac:chgData name="Bryan Sun" userId="851caa7714272873" providerId="LiveId" clId="{1DF0C224-3A3E-55A6-A8D1-F8F2208D385B}" dt="2025-10-25T23:04:44.589" v="1546" actId="20577"/>
-          <ac:spMkLst>
-            <pc:docMk/>
-            <pc:sldMk cId="1886648737" sldId="357"/>
-            <ac:spMk id="10" creationId="{0FCBC588-591D-4D50-89B9-2BDAF880E306}"/>
-          </ac:spMkLst>
-        </pc:spChg>
-        <pc:spChg chg="mod">
-          <ac:chgData name="Bryan Sun" userId="851caa7714272873" providerId="LiveId" clId="{1DF0C224-3A3E-55A6-A8D1-F8F2208D385B}" dt="2025-11-16T11:52:36.053" v="2033" actId="313"/>
-          <ac:spMkLst>
-            <pc:docMk/>
-            <pc:sldMk cId="1886648737" sldId="357"/>
-            <ac:spMk id="11" creationId="{51B55793-79B0-452A-BA9B-A5A8E23053FD}"/>
-          </ac:spMkLst>
-        </pc:spChg>
-        <pc:spChg chg="mod">
-          <ac:chgData name="Bryan Sun" userId="851caa7714272873" providerId="LiveId" clId="{1DF0C224-3A3E-55A6-A8D1-F8F2208D385B}" dt="2025-10-25T23:08:23.285" v="1643" actId="1038"/>
-          <ac:spMkLst>
-            <pc:docMk/>
-            <pc:sldMk cId="1886648737" sldId="357"/>
-            <ac:spMk id="12" creationId="{C4876D6F-1C30-423C-90F6-C3EBC5C818D8}"/>
-          </ac:spMkLst>
-        </pc:spChg>
-        <pc:spChg chg="mod">
-          <ac:chgData name="Bryan Sun" userId="851caa7714272873" providerId="LiveId" clId="{1DF0C224-3A3E-55A6-A8D1-F8F2208D385B}" dt="2025-10-25T23:08:34.794" v="1667" actId="1038"/>
-          <ac:spMkLst>
-            <pc:docMk/>
-            <pc:sldMk cId="1886648737" sldId="357"/>
-            <ac:spMk id="13" creationId="{12F4A0FE-3CBC-4738-9D9C-677A0DF5AC84}"/>
-          </ac:spMkLst>
-        </pc:spChg>
-      </pc:sldChg>
-      <pc:sldChg chg="modSp mod">
-        <pc:chgData name="Bryan Sun" userId="851caa7714272873" providerId="LiveId" clId="{1DF0C224-3A3E-55A6-A8D1-F8F2208D385B}" dt="2025-10-25T23:12:04.192" v="1777" actId="20577"/>
-        <pc:sldMkLst>
-          <pc:docMk/>
-          <pc:sldMk cId="2391467191" sldId="361"/>
-        </pc:sldMkLst>
-        <pc:spChg chg="mod">
-          <ac:chgData name="Bryan Sun" userId="851caa7714272873" providerId="LiveId" clId="{1DF0C224-3A3E-55A6-A8D1-F8F2208D385B}" dt="2025-10-25T23:12:04.192" v="1777" actId="20577"/>
-          <ac:spMkLst>
-            <pc:docMk/>
-            <pc:sldMk cId="2391467191" sldId="361"/>
-            <ac:spMk id="3" creationId="{364B6489-5513-4724-81F7-F874B8C60D21}"/>
-          </ac:spMkLst>
-        </pc:spChg>
-        <pc:spChg chg="mod">
-          <ac:chgData name="Bryan Sun" userId="851caa7714272873" providerId="LiveId" clId="{1DF0C224-3A3E-55A6-A8D1-F8F2208D385B}" dt="2025-10-25T23:11:24.449" v="1753" actId="1076"/>
-          <ac:spMkLst>
-            <pc:docMk/>
-            <pc:sldMk cId="2391467191" sldId="361"/>
-            <ac:spMk id="5" creationId="{33B076D9-F8A4-4BD0-A94A-3CFE7CF3AE8F}"/>
-          </ac:spMkLst>
-        </pc:spChg>
-        <pc:spChg chg="mod">
-          <ac:chgData name="Bryan Sun" userId="851caa7714272873" providerId="LiveId" clId="{1DF0C224-3A3E-55A6-A8D1-F8F2208D385B}" dt="2025-10-25T23:10:34.575" v="1726" actId="20577"/>
-          <ac:spMkLst>
-            <pc:docMk/>
-            <pc:sldMk cId="2391467191" sldId="361"/>
-            <ac:spMk id="6" creationId="{6AA6BD2E-44ED-4FFA-8021-56C25806D790}"/>
-          </ac:spMkLst>
-        </pc:spChg>
-        <pc:spChg chg="mod">
-          <ac:chgData name="Bryan Sun" userId="851caa7714272873" providerId="LiveId" clId="{1DF0C224-3A3E-55A6-A8D1-F8F2208D385B}" dt="2025-10-23T09:28:49.885" v="808" actId="20577"/>
-          <ac:spMkLst>
-            <pc:docMk/>
-            <pc:sldMk cId="2391467191" sldId="361"/>
-            <ac:spMk id="7" creationId="{7123F86B-D800-45CC-A8F1-22C2B943DF76}"/>
-          </ac:spMkLst>
-        </pc:spChg>
-        <pc:spChg chg="mod">
-          <ac:chgData name="Bryan Sun" userId="851caa7714272873" providerId="LiveId" clId="{1DF0C224-3A3E-55A6-A8D1-F8F2208D385B}" dt="2025-10-25T23:11:47.143" v="1762" actId="20577"/>
-          <ac:spMkLst>
-            <pc:docMk/>
-            <pc:sldMk cId="2391467191" sldId="361"/>
-            <ac:spMk id="8" creationId="{FDD194C9-F314-4885-BBA2-07A39836EA29}"/>
-          </ac:spMkLst>
-        </pc:spChg>
-        <pc:spChg chg="mod">
-          <ac:chgData name="Bryan Sun" userId="851caa7714272873" providerId="LiveId" clId="{1DF0C224-3A3E-55A6-A8D1-F8F2208D385B}" dt="2025-10-25T23:11:56.771" v="1769" actId="20577"/>
-          <ac:spMkLst>
-            <pc:docMk/>
-            <pc:sldMk cId="2391467191" sldId="361"/>
-            <ac:spMk id="9" creationId="{108CDC36-5B82-4904-B859-A466BD10AF31}"/>
-          </ac:spMkLst>
-        </pc:spChg>
-      </pc:sldChg>
-      <pc:sldChg chg="addSp delSp modSp mod delAnim modAnim">
-        <pc:chgData name="Bryan Sun" userId="851caa7714272873" providerId="LiveId" clId="{1DF0C224-3A3E-55A6-A8D1-F8F2208D385B}" dt="2025-11-16T11:53:56.368" v="2088" actId="1038"/>
-        <pc:sldMkLst>
-          <pc:docMk/>
-          <pc:sldMk cId="815647709" sldId="362"/>
-        </pc:sldMkLst>
-        <pc:spChg chg="mod">
-          <ac:chgData name="Bryan Sun" userId="851caa7714272873" providerId="LiveId" clId="{1DF0C224-3A3E-55A6-A8D1-F8F2208D385B}" dt="2025-11-16T11:53:21.423" v="2056" actId="6549"/>
-          <ac:spMkLst>
-            <pc:docMk/>
-            <pc:sldMk cId="815647709" sldId="362"/>
-            <ac:spMk id="3" creationId="{364B6489-5513-4724-81F7-F874B8C60D21}"/>
-          </ac:spMkLst>
-        </pc:spChg>
-        <pc:spChg chg="mod">
-          <ac:chgData name="Bryan Sun" userId="851caa7714272873" providerId="LiveId" clId="{1DF0C224-3A3E-55A6-A8D1-F8F2208D385B}" dt="2025-11-16T11:53:52.476" v="2084" actId="20577"/>
-          <ac:spMkLst>
-            <pc:docMk/>
-            <pc:sldMk cId="815647709" sldId="362"/>
-            <ac:spMk id="5" creationId="{1E8B2A7E-CFF0-40BB-BBEA-FBDE1D26BB0B}"/>
-          </ac:spMkLst>
-        </pc:spChg>
-        <pc:spChg chg="mod">
-          <ac:chgData name="Bryan Sun" userId="851caa7714272873" providerId="LiveId" clId="{1DF0C224-3A3E-55A6-A8D1-F8F2208D385B}" dt="2025-10-25T23:12:25.205" v="1782" actId="20577"/>
-          <ac:spMkLst>
-            <pc:docMk/>
-            <pc:sldMk cId="815647709" sldId="362"/>
-            <ac:spMk id="7" creationId="{6C5D6E6E-8D4A-4530-B628-CD15305998EB}"/>
-          </ac:spMkLst>
-        </pc:spChg>
-        <pc:spChg chg="mod">
-          <ac:chgData name="Bryan Sun" userId="851caa7714272873" providerId="LiveId" clId="{1DF0C224-3A3E-55A6-A8D1-F8F2208D385B}" dt="2025-10-25T23:12:19.208" v="1781" actId="20577"/>
-          <ac:spMkLst>
-            <pc:docMk/>
-            <pc:sldMk cId="815647709" sldId="362"/>
-            <ac:spMk id="8" creationId="{BB87607E-B389-4402-A9D0-9623C5D29C4A}"/>
-          </ac:spMkLst>
-        </pc:spChg>
-        <pc:spChg chg="mod">
-          <ac:chgData name="Bryan Sun" userId="851caa7714272873" providerId="LiveId" clId="{1DF0C224-3A3E-55A6-A8D1-F8F2208D385B}" dt="2025-10-25T23:15:46.696" v="1802" actId="1037"/>
-          <ac:spMkLst>
-            <pc:docMk/>
-            <pc:sldMk cId="815647709" sldId="362"/>
-            <ac:spMk id="10" creationId="{8107B1C1-B147-43E6-9DFB-3E995A59AE49}"/>
-          </ac:spMkLst>
-        </pc:spChg>
-        <pc:spChg chg="mod">
-          <ac:chgData name="Bryan Sun" userId="851caa7714272873" providerId="LiveId" clId="{1DF0C224-3A3E-55A6-A8D1-F8F2208D385B}" dt="2025-10-25T23:15:57.219" v="1804" actId="1076"/>
-          <ac:spMkLst>
-            <pc:docMk/>
-            <pc:sldMk cId="815647709" sldId="362"/>
-            <ac:spMk id="13" creationId="{9ECA6878-7FD0-4585-A025-CB37A56DD348}"/>
-          </ac:spMkLst>
-        </pc:spChg>
-        <pc:spChg chg="mod">
-          <ac:chgData name="Bryan Sun" userId="851caa7714272873" providerId="LiveId" clId="{1DF0C224-3A3E-55A6-A8D1-F8F2208D385B}" dt="2025-10-25T23:16:03.849" v="1805" actId="1076"/>
-          <ac:spMkLst>
-            <pc:docMk/>
-            <pc:sldMk cId="815647709" sldId="362"/>
-            <ac:spMk id="15" creationId="{F8D59B9D-6708-4221-A5DD-98A11E2F73DF}"/>
-          </ac:spMkLst>
-        </pc:spChg>
-        <pc:spChg chg="mod">
-          <ac:chgData name="Bryan Sun" userId="851caa7714272873" providerId="LiveId" clId="{1DF0C224-3A3E-55A6-A8D1-F8F2208D385B}" dt="2025-10-25T23:15:46.696" v="1802" actId="1037"/>
-          <ac:spMkLst>
-            <pc:docMk/>
-            <pc:sldMk cId="815647709" sldId="362"/>
-            <ac:spMk id="16" creationId="{0DE6833B-95CD-4CD1-B1B2-885CB81133F0}"/>
-          </ac:spMkLst>
-        </pc:spChg>
-        <pc:spChg chg="mod">
-          <ac:chgData name="Bryan Sun" userId="851caa7714272873" providerId="LiveId" clId="{1DF0C224-3A3E-55A6-A8D1-F8F2208D385B}" dt="2025-10-25T23:15:46.696" v="1802" actId="1037"/>
-          <ac:spMkLst>
-            <pc:docMk/>
-            <pc:sldMk cId="815647709" sldId="362"/>
-            <ac:spMk id="17" creationId="{5D62FEE9-E164-4774-9120-78CA2CDFAA62}"/>
-          </ac:spMkLst>
-        </pc:spChg>
-        <pc:spChg chg="mod">
-          <ac:chgData name="Bryan Sun" userId="851caa7714272873" providerId="LiveId" clId="{1DF0C224-3A3E-55A6-A8D1-F8F2208D385B}" dt="2025-11-16T11:53:41.575" v="2075" actId="1038"/>
-          <ac:spMkLst>
-            <pc:docMk/>
-            <pc:sldMk cId="815647709" sldId="362"/>
-            <ac:spMk id="18" creationId="{4B4C3C94-F3C7-4876-AEB5-D81A5ADF795C}"/>
-          </ac:spMkLst>
-        </pc:spChg>
-        <pc:picChg chg="mod">
-          <ac:chgData name="Bryan Sun" userId="851caa7714272873" providerId="LiveId" clId="{1DF0C224-3A3E-55A6-A8D1-F8F2208D385B}" dt="2025-11-16T11:53:56.368" v="2088" actId="1038"/>
-          <ac:picMkLst>
-            <pc:docMk/>
-            <pc:sldMk cId="815647709" sldId="362"/>
-            <ac:picMk id="11" creationId="{56E85B03-54F5-4001-A9E1-6FDC49E04D79}"/>
-          </ac:picMkLst>
-        </pc:picChg>
-        <pc:picChg chg="mod">
-          <ac:chgData name="Bryan Sun" userId="851caa7714272873" providerId="LiveId" clId="{1DF0C224-3A3E-55A6-A8D1-F8F2208D385B}" dt="2025-10-25T23:15:46.696" v="1802" actId="1037"/>
-          <ac:picMkLst>
-            <pc:docMk/>
-            <pc:sldMk cId="815647709" sldId="362"/>
-            <ac:picMk id="12" creationId="{6F1A36E9-DA64-46D9-9131-FD4928739875}"/>
-          </ac:picMkLst>
-        </pc:picChg>
-        <pc:picChg chg="mod">
-          <ac:chgData name="Bryan Sun" userId="851caa7714272873" providerId="LiveId" clId="{1DF0C224-3A3E-55A6-A8D1-F8F2208D385B}" dt="2025-10-25T23:15:46.696" v="1802" actId="1037"/>
-          <ac:picMkLst>
-            <pc:docMk/>
-            <pc:sldMk cId="815647709" sldId="362"/>
-            <ac:picMk id="14" creationId="{3930AF42-7A36-4B99-8FB0-542343A24DDC}"/>
-          </ac:picMkLst>
-        </pc:picChg>
-        <pc:cxnChg chg="mod">
-          <ac:chgData name="Bryan Sun" userId="851caa7714272873" providerId="LiveId" clId="{1DF0C224-3A3E-55A6-A8D1-F8F2208D385B}" dt="2025-11-16T11:53:41.575" v="2075" actId="1038"/>
-          <ac:cxnSpMkLst>
-            <pc:docMk/>
-            <pc:sldMk cId="815647709" sldId="362"/>
-            <ac:cxnSpMk id="22" creationId="{AAA9F176-2A13-4626-9543-73380D2BAC0C}"/>
-          </ac:cxnSpMkLst>
-        </pc:cxnChg>
-      </pc:sldChg>
-      <pc:sldChg chg="modSp mod">
-        <pc:chgData name="Bryan Sun" userId="851caa7714272873" providerId="LiveId" clId="{1DF0C224-3A3E-55A6-A8D1-F8F2208D385B}" dt="2025-11-16T11:55:25.641" v="2162" actId="20577"/>
-        <pc:sldMkLst>
-          <pc:docMk/>
-          <pc:sldMk cId="2397196102" sldId="363"/>
-        </pc:sldMkLst>
-        <pc:spChg chg="mod">
-          <ac:chgData name="Bryan Sun" userId="851caa7714272873" providerId="LiveId" clId="{1DF0C224-3A3E-55A6-A8D1-F8F2208D385B}" dt="2025-11-16T11:55:25.641" v="2162" actId="20577"/>
-          <ac:spMkLst>
-            <pc:docMk/>
-            <pc:sldMk cId="2397196102" sldId="363"/>
-            <ac:spMk id="3" creationId="{364B6489-5513-4724-81F7-F874B8C60D21}"/>
-          </ac:spMkLst>
-        </pc:spChg>
-        <pc:spChg chg="mod">
-          <ac:chgData name="Bryan Sun" userId="851caa7714272873" providerId="LiveId" clId="{1DF0C224-3A3E-55A6-A8D1-F8F2208D385B}" dt="2025-10-25T23:18:57.784" v="1855" actId="20577"/>
-          <ac:spMkLst>
-            <pc:docMk/>
-            <pc:sldMk cId="2397196102" sldId="363"/>
-            <ac:spMk id="6" creationId="{C90E7E59-03DB-49DC-8E37-5F868383B783}"/>
-          </ac:spMkLst>
-        </pc:spChg>
+            <ac:inkMk id="2" creationId="{BB9ADFB3-56A3-A6BE-A46E-32CFA395060D}"/>
+          </ac:inkMkLst>
+        </pc:inkChg>
       </pc:sldChg>
     </pc:docChg>
   </pc:docChgLst>
 </pc:chgInfo>
+</file>
+
+<file path=ppt/ink/ink1.xml><?xml version="1.0" encoding="utf-8"?>
+<inkml:ink xmlns:inkml="http://www.w3.org/2003/InkML">
+  <inkml:definitions>
+    <inkml:context xml:id="ctx0">
+      <inkml:inkSource xml:id="inkSrc0">
+        <inkml:traceFormat>
+          <inkml:channel name="X" type="integer" min="-2.14748E9" max="2.14748E9" units="cm"/>
+          <inkml:channel name="Y" type="integer" min="-2.14748E9" max="2.14748E9" units="cm"/>
+          <inkml:channel name="F" type="integer" max="32767" units="dev"/>
+        </inkml:traceFormat>
+        <inkml:channelProperties>
+          <inkml:channelProperty channel="X" name="resolution" value="1000" units="1/cm"/>
+          <inkml:channelProperty channel="Y" name="resolution" value="1000" units="1/cm"/>
+          <inkml:channelProperty channel="F" name="resolution" value="0" units="1/dev"/>
+        </inkml:channelProperties>
+      </inkml:inkSource>
+    </inkml:context>
+    <inkml:brush xml:id="br0">
+      <inkml:brushProperty name="width" value="0.09086" units="cm"/>
+      <inkml:brushProperty name="height" value="0.09086" units="cm"/>
+      <inkml:brushProperty name="color" value="#FF0000"/>
+    </inkml:brush>
+  </inkml:definitions>
+  <inkml:trace contextRef="#ctx0" brushRef="#br0">5887 7408 8031,'-9'-16'-23,"-4"-1"0,7 1 354,3-1-19,1 8 1,2 0-1,2 5 95,3-1 0,-1-1 0,7 6-121,2 0 0,2 0 0,3 0 0,2 0-119,2 0 0,8 0 0,-3 0 0,6 0-107,6 0 0,-2-2 0,8-1 0,5-3-62,3 2 1,15 1 0,2-1 0,9-3 16,11-2 0,-43 3 1,0 1-1,2-3 1,-1-1-1,0 1 1,0-1 30,-1 1 0,1 0 1,4 0-1,-1-1 0,-3 2 1,0 0-1,1 0 0,-1 1 10,44-5 1,-45 6 0,0 1 0,45-9-1,-46 8 1,1 1-41,0 0 1,0 0 0,39-7 0,3 4 0,-7-1-31,-5 1 0,4 0 1,-5 3-1,-1-1 29,-3 1 1,-14-3 0,-8 1 0,-10 2 32,-5 3 1,-3 1 0,-3 0 0,-3 0-44,-2 0 1,-2 0 0,-6 0 0,-1 1 18,-4 5 1,4-4-1,-4 3 10,3-3 1,3 0 0,-1 2 2,1 1 1,-1 1 0,1-6 0,0 0-91,-1 0 1,1 0 0,-1 0-279,1 0 1,-1 0-1624,1 0 868,-8 0 0,-4 0 1086,-10 0 0,-26-15 0,-13-3 0</inkml:trace>
+  <inkml:trace contextRef="#ctx0" brushRef="#br0">9608 7144 7908,'-6'-11'-6,"1"0"0,-1 0 0,4-4 0,-1 2 513,-3 2-197,1 7 1,6-3-53,5 7 1,-2 0-1,7 0 1,2 0-70,1 0 0,3 2 0,1 2 1,2 1-117,2-1 0,8 3 0,-1 0 0,8 1-39,7-1 0,4 4 0,1-3 1,3-1 27,3 0 1,13-1 0,15-6 0,9 0-28,-44 0 1,1 0-1,0 0 1,1 0-1,0 0 1,1 0-1,3-1 1,1 0-13,5-1 0,1-2 1,-3 1-1,0-1 1,3-2-1,1-1 1,-5 2-1,0 1-44,-1 0 0,0 1 0,3-3 0,1 1 0,-1 1 0,0 2 0,-4 0 0,-2 0 40,-5 1 0,0 1 0,45 0 0,-1 0 0,0 0 59,-4 0 1,-16 0-1,-6 0 1,-2 0-38,1 0 0,3 0 1,0 0-1,-4 0-102,-11 0 0,-9 5 1,-12 1-1,-5-3-446,-5-1 313,-3 5 0,-10-3-608,-4 7 121,-3-7 0,-2 5-680,0-3 1361,0-5 0,-22 7 0,-5-8 0</inkml:trace>
+  <inkml:trace contextRef="#ctx0" brushRef="#br0">6995 5854 7824,'-33'-7'-51,"2"-1"0,3-5 0,4 4 1,2 2 538,0 3 1,-7 2-1,1 2-465,-3 0 1,-10 0-1,-4 0 1,-7 0 175,-3 0 1,-11 6-1,5 3 1,4 4-87,4 5 0,1 17 0,-3 6 0,-7 12-59,27-21 0,0 2 1,0 3-1,0 1 0,-3 6 1,1 1-1,0 1 1,2 1 20,2 1 1,2 2-1,1-1 1,3 1-1,4-2 1,2 1-1,1-2 1,1 0-47,1-3 0,1 0 1,-8 39-1,4-4 0,9-4-70,6-1 1,19 3 0,11-4 0,11 1-45,9-1 0,5 4 0,7-5 1,-25-36-1,2 0-62,3 2 1,3-3 0,8-3 0,4-3 0,6 1 0,3-1 0,0-5 0,1-2-101,0-4 0,2-3 1,5-5-1,1-6 0,2-5 1,0-5-1,5-5 1,2-4 230,4-3 1,0-4 0,0-4-1,1-3 1,3-2 0,-1-1-1,-4-2 1,0-2 56,-1-1 0,-2-3 0,-6 0 1,-1-2-1,1-2 0,-1-1 1,-4-1-1,-3-1-15,-5-1 0,-3-2 0,-2 2 0,-5-3 0,-10 2 0,-4-1 1,-4 1-1,-3 1-18,-6 1 1,-4 0 0,-3-3-1,-4-1 1,-4 3 0,-3 0 0,-1 1-1,-2 1-31,-5-46 0,-5 2 0,-10 1 0,8 43 0,-2-1 15,-2-2 0,-3 0 1,-1 3-1,-4 2 1,-4 2-1,-3 2 0,-2 3 1,-2 2 6,-2 3 1,-3 2 0,-6-2 0,-2 3 0,0 4 0,-2 2 0,1 3-1,-1 3 65,-2 3 1,-1 3-1,-7 3 1,-1 5-1,-6 0 1,-1 4-1,1 2 1,0 3-156,1 4 0,1 2 1,0 2-1,2 3 1,3 2-1,2 1 0,4 0 1,1 2-251,5-1 0,2 0 1,1 3-1,2 0 1,-28 18 340,6 1 0,-4 1 0,13 0 0,3 7 0</inkml:trace>
+  <inkml:trace contextRef="#ctx0" brushRef="#br0">11592 5788 7956,'-11'-22'45,"0"-2"1,-2-2 0,0-1 181,2 1 1,-3 2 0,3 6-192,-4-4 1,-4 9 0,-3-4 0,-5 4 13,-4 4 0,-4 2 0,-4 7 0,-5 0 11,-4 0 0,-1 7 0,-1 4 1,-1 4-33,-5 1 1,-4 8 0,-15 6 0,-10 6 16,39-14 1,0 0 0,-1 3-1,0 0 1,5 1 0,0 1 0,-2 2-1,0-1 8,-3 1 0,0 1 0,0 2 1,0 2-1,3 2 0,2 0 0,5-1 1,2 0 203,-24 33 0,15-2 1,6-2-1,5-3-106,5-6 1,4 2-1,10 0 1,3 2-171,5 3 0,8 1 0,9-1 1,13-3-101,11-2 0,7 3 0,9-3 0,8 0-1,13 0 1,-29-32 0,4-4 0,8-3 0,2-3 0,2-2 0,1-2 43,3 0 1,1-3 0,10-4 0,1-3-1,3-2 1,0-3 0,3-6 0,0-4-61,3-5 1,1-3-1,1-3 1,1-3-1,-26 5 1,0-1-1,0-1 1,1 0-1,-1-1 1,0 0 130,0 0 0,0-1 1,-1-1-1,-2 1 1,-1-1-1,-1-1 1,21-14-1,-2-2 1,-2-1-1,-2-2-35,-3 0 0,-4-1 0,-9 4 1,-5-1-1,-10 5 0,-5 0 1,11-33-48,-24 6 1,-13 2 0,-12-2 0,-8-2-198,-12-1 1,-8 6 0,-7 10 282,-6 4 0,-1 3 0,-4 4 0,-4 4 0</inkml:trace>
+  <inkml:trace contextRef="#ctx0" brushRef="#br0">7045 8665 8190,'-32'-7'0,"5"-4"1164,5-4 0,3 4-872,3 0 1,8 7 0,10-1 47,13 3 1,5 0 0,13-2 0,8-1-194,5 1 1,5 1 0,2-1 0,4-2-332,2 3 0,-6-5 0,2 3 0,-3-1-48,-2-1 0,-1 5 0,-1-3 0,-6 3-1598,-9 2 1246,0-8 1,-23 8 0,-7-1 0,-16 6 240,-12 4 0,-8-3 0,-6 5 0,-5 2 343,-4 1 0,-2 5 0,1 1 0,-1 2 0,1-2 0,-3-1 0,-3-3 0,-4 1 28,0-1 1,-5 1 0,7-3-1,2-2 624,5-7 0,19-3 1,4-2 1132,6 0 1,14-2-1312,7-3 1,9 1 0,13-5-1,8-1-306,7 1 1,7-4 0,11-7-1,7-2-30,8 2 1,4 0 0,5 0-1,-2-3-718,2 3 0,3 4 0,3 3 1,-2 4-3099,-8 1 3678,-5 3 0,-4 20 0,0 3 0</inkml:trace>
+  <inkml:trace contextRef="#ctx0" brushRef="#br0">9475 8599 7703,'11'-6'225,"0"1"1,-5-6-1,5 5 1,0 1 368,-2-2 0,6 5 0,-2-4-383,7 4 1,8 2 0,12 0 0,11 0 63,14 0 1,8-5 0,10-1 0,1 1-294,5-3 0,-43 7 0,1-1 1,3-3-1,0 1 0,-3 0 0,-1 0-323,35 1 0,-20-5 0,-17 3 0,-15 1-400,-9 2 0,-12 2 1,-8 0-589,-9 0 1329,-6 0 0,-38 0 0,-10 0 0</inkml:trace>
+  <inkml:trace contextRef="#ctx0" brushRef="#br0">9624 8698 7829,'-33'9'0,"2"-3"1343,3-4 1,8-2-957,15 0 0,8 2 1,21 1-1,9 3-274,10-3 1,6-3 0,8-3 0,7-5-128,6-1 1,9-2 0,0-5 0,8-1-258,-41 9 1,1 0-1,4-1 1,1 1 193,0 0 1,1-1-1,10-2 1,1-1 0,-1-1-1,0 0 1</inkml:trace>
+  <inkml:trace contextRef="#ctx0" brushRef="#br0">9790 10153 8316,'16'-11'461,"1"0"1,-1 8 0,3-5-1,1 3-242,2-1 0,2 1 1,-2 3-1,5-2-129,5-1 1,1-1 0,3 6 0,8 2 21,12 4 1,13-5 0,9 5-1,4-4-62,6-2 1,-40 0 0,2 0 0,5 0 0,2 0 0,3-1 0,1 0-32,0-2 0,-1 0 0,-2 2 0,-2-1 0,0-3 0,-1 1 0,1 0 0,2 0-49,1 2 0,1 1 0,-6-1 0,-1 2 1,-2 0-1,-1 0 0,34 0-160,-9 0 0,6 0 1,-4 0-1,-1 0-42,-12 0 1,-16 0 0,-11 0 0,-8 0-398,-7 0 108,-11 0 1,-5 0-34,-12 0 0,-5 7 0,-9 2 554,-2 0 0,-37 0 0,-14-3 0,-5-1 0,1-1 0</inkml:trace>
+  <inkml:trace contextRef="#ctx0" brushRef="#br0">9955 10484 8070,'-11'-7'23,"0"-4"1,9 2-1,4-1 1,11 3 366,7 3 0,11 1 0,2-1 0,10-2 0,15-5 0,12 4 0,13 0-105,7-1 0,2-4 1,-44 7-1,1 0 0,1 0 1,1-1-210,5 0 0,0 1 1,-2 2-1,-1 1 0,2-3 1,0 1-1,-4-1 0,-1 0-44,-3 1 0,0-1 1,5 1-1,1-1 1,-2-1-1,0-1 0,2 2 1,-1 1-38,-2 0 0,-1 1 1,-1-3-1,-2 1 1,42-1-1,-41 4 1,0 0-46,2 2 1,-1-1 0,37-5-1,-10 1 1,-9 1 8,-5 2 1,0 0-1,3-1 1,-5-3-64,-10 2 1,-1 3-1,-11 1 1,-6 0-670,-7 0 1,-7 1-68,-6 5 0,-4-2 0,-7 7 840,0 1 0,-15 3 0,-3 2 0</inkml:trace>
+</inkml:ink>
 </file>
 
 <file path=ppt/notesMasters/notesMaster1.xml><?xml version="1.0" encoding="utf-8"?>
@@ -971,7 +271,7 @@
           <a:p>
             <a:fld id="{D21C24E5-4498-9F45-ACB2-52E730646718}" type="datetimeFigureOut">
               <a:rPr lang="en-AU" smtClean="0"/>
-              <a:t>19/11/2025</a:t>
+              <a:t>18/10/2026</a:t>
             </a:fld>
             <a:endParaRPr lang="en-AU"/>
           </a:p>
@@ -1373,7 +673,7 @@
           <a:noFill/>
           <a:extLst>
             <a:ext uri="{909E8E84-426E-40dd-AFC4-6F175D3DCCD1}">
-              <a14:hiddenFill xmlns="" xmlns:a14="http://schemas.microsoft.com/office/drawing/2010/main">
+              <a14:hiddenFill xmlns:a14="http://schemas.microsoft.com/office/drawing/2010/main" xmlns="">
                 <a:solidFill>
                   <a:srgbClr val="FFFFFF"/>
                 </a:solidFill>
@@ -1433,7 +733,7 @@
             </a:ln>
             <a:extLst>
               <a:ext uri="{91240B29-F687-4f45-9708-019B960494DF}">
-                <a14:hiddenLine xmlns="" xmlns:a14="http://schemas.microsoft.com/office/drawing/2010/main" w="9525">
+                <a14:hiddenLine xmlns:a14="http://schemas.microsoft.com/office/drawing/2010/main" xmlns="" w="9525">
                   <a:solidFill>
                     <a:srgbClr val="000000"/>
                   </a:solidFill>
@@ -1530,7 +830,7 @@
             </a:ln>
             <a:extLst>
               <a:ext uri="{91240B29-F687-4f45-9708-019B960494DF}">
-                <a14:hiddenLine xmlns="" xmlns:a14="http://schemas.microsoft.com/office/drawing/2010/main" w="9525">
+                <a14:hiddenLine xmlns:a14="http://schemas.microsoft.com/office/drawing/2010/main" xmlns="" w="9525">
                   <a:solidFill>
                     <a:srgbClr val="000000"/>
                   </a:solidFill>
@@ -1627,7 +927,7 @@
             </a:ln>
             <a:extLst>
               <a:ext uri="{91240B29-F687-4f45-9708-019B960494DF}">
-                <a14:hiddenLine xmlns="" xmlns:a14="http://schemas.microsoft.com/office/drawing/2010/main" w="9525">
+                <a14:hiddenLine xmlns:a14="http://schemas.microsoft.com/office/drawing/2010/main" xmlns="" w="9525">
                   <a:solidFill>
                     <a:srgbClr val="000000"/>
                   </a:solidFill>
@@ -1668,7 +968,7 @@
             </a:ln>
             <a:extLst>
               <a:ext uri="{91240B29-F687-4f45-9708-019B960494DF}">
-                <a14:hiddenLine xmlns="" xmlns:a14="http://schemas.microsoft.com/office/drawing/2010/main" w="9525">
+                <a14:hiddenLine xmlns:a14="http://schemas.microsoft.com/office/drawing/2010/main" xmlns="" w="9525">
                   <a:solidFill>
                     <a:srgbClr val="000000"/>
                   </a:solidFill>
@@ -1765,7 +1065,7 @@
             </a:ln>
             <a:extLst>
               <a:ext uri="{91240B29-F687-4f45-9708-019B960494DF}">
-                <a14:hiddenLine xmlns="" xmlns:a14="http://schemas.microsoft.com/office/drawing/2010/main" w="9525">
+                <a14:hiddenLine xmlns:a14="http://schemas.microsoft.com/office/drawing/2010/main" xmlns="" w="9525">
                   <a:solidFill>
                     <a:srgbClr val="000000"/>
                   </a:solidFill>
@@ -1834,7 +1134,7 @@
             </a:ln>
             <a:extLst>
               <a:ext uri="{91240B29-F687-4f45-9708-019B960494DF}">
-                <a14:hiddenLine xmlns="" xmlns:a14="http://schemas.microsoft.com/office/drawing/2010/main" w="9525">
+                <a14:hiddenLine xmlns:a14="http://schemas.microsoft.com/office/drawing/2010/main" xmlns="" w="9525">
                   <a:solidFill>
                     <a:srgbClr val="000000"/>
                   </a:solidFill>
@@ -1903,7 +1203,7 @@
             </a:ln>
             <a:extLst>
               <a:ext uri="{91240B29-F687-4f45-9708-019B960494DF}">
-                <a14:hiddenLine xmlns="" xmlns:a14="http://schemas.microsoft.com/office/drawing/2010/main" w="9525">
+                <a14:hiddenLine xmlns:a14="http://schemas.microsoft.com/office/drawing/2010/main" xmlns="" w="9525">
                   <a:solidFill>
                     <a:srgbClr val="000000"/>
                   </a:solidFill>
@@ -2000,7 +1300,7 @@
             </a:ln>
             <a:extLst>
               <a:ext uri="{91240B29-F687-4f45-9708-019B960494DF}">
-                <a14:hiddenLine xmlns="" xmlns:a14="http://schemas.microsoft.com/office/drawing/2010/main" w="9525">
+                <a14:hiddenLine xmlns:a14="http://schemas.microsoft.com/office/drawing/2010/main" xmlns="" w="9525">
                   <a:solidFill>
                     <a:srgbClr val="000000"/>
                   </a:solidFill>
@@ -2069,7 +1369,7 @@
             </a:ln>
             <a:extLst>
               <a:ext uri="{91240B29-F687-4f45-9708-019B960494DF}">
-                <a14:hiddenLine xmlns="" xmlns:a14="http://schemas.microsoft.com/office/drawing/2010/main" w="9525">
+                <a14:hiddenLine xmlns:a14="http://schemas.microsoft.com/office/drawing/2010/main" xmlns="" w="9525">
                   <a:solidFill>
                     <a:srgbClr val="000000"/>
                   </a:solidFill>
@@ -2138,7 +1438,7 @@
             </a:ln>
             <a:extLst>
               <a:ext uri="{91240B29-F687-4f45-9708-019B960494DF}">
-                <a14:hiddenLine xmlns="" xmlns:a14="http://schemas.microsoft.com/office/drawing/2010/main" w="9525">
+                <a14:hiddenLine xmlns:a14="http://schemas.microsoft.com/office/drawing/2010/main" xmlns="" w="9525">
                   <a:solidFill>
                     <a:srgbClr val="000000"/>
                   </a:solidFill>
@@ -2235,7 +1535,7 @@
             </a:ln>
             <a:extLst>
               <a:ext uri="{91240B29-F687-4f45-9708-019B960494DF}">
-                <a14:hiddenLine xmlns="" xmlns:a14="http://schemas.microsoft.com/office/drawing/2010/main" w="9525">
+                <a14:hiddenLine xmlns:a14="http://schemas.microsoft.com/office/drawing/2010/main" xmlns="" w="9525">
                   <a:solidFill>
                     <a:srgbClr val="000000"/>
                   </a:solidFill>
@@ -2332,7 +1632,7 @@
             </a:ln>
             <a:extLst>
               <a:ext uri="{91240B29-F687-4f45-9708-019B960494DF}">
-                <a14:hiddenLine xmlns="" xmlns:a14="http://schemas.microsoft.com/office/drawing/2010/main" w="9525">
+                <a14:hiddenLine xmlns:a14="http://schemas.microsoft.com/office/drawing/2010/main" xmlns="" w="9525">
                   <a:solidFill>
                     <a:srgbClr val="000000"/>
                   </a:solidFill>
@@ -2401,7 +1701,7 @@
             </a:ln>
             <a:extLst>
               <a:ext uri="{91240B29-F687-4f45-9708-019B960494DF}">
-                <a14:hiddenLine xmlns="" xmlns:a14="http://schemas.microsoft.com/office/drawing/2010/main" w="9525">
+                <a14:hiddenLine xmlns:a14="http://schemas.microsoft.com/office/drawing/2010/main" xmlns="" w="9525">
                   <a:solidFill>
                     <a:srgbClr val="000000"/>
                   </a:solidFill>
@@ -2518,7 +1818,7 @@
             </a:ln>
             <a:extLst>
               <a:ext uri="{91240B29-F687-4f45-9708-019B960494DF}">
-                <a14:hiddenLine xmlns="" xmlns:a14="http://schemas.microsoft.com/office/drawing/2010/main" w="9525">
+                <a14:hiddenLine xmlns:a14="http://schemas.microsoft.com/office/drawing/2010/main" xmlns="" w="9525">
                   <a:solidFill>
                     <a:srgbClr val="000000"/>
                   </a:solidFill>
@@ -2587,7 +1887,7 @@
             </a:ln>
             <a:extLst>
               <a:ext uri="{91240B29-F687-4f45-9708-019B960494DF}">
-                <a14:hiddenLine xmlns="" xmlns:a14="http://schemas.microsoft.com/office/drawing/2010/main" w="9525">
+                <a14:hiddenLine xmlns:a14="http://schemas.microsoft.com/office/drawing/2010/main" xmlns="" w="9525">
                   <a:solidFill>
                     <a:srgbClr val="000000"/>
                   </a:solidFill>
@@ -2684,7 +1984,7 @@
             </a:ln>
             <a:extLst>
               <a:ext uri="{91240B29-F687-4f45-9708-019B960494DF}">
-                <a14:hiddenLine xmlns="" xmlns:a14="http://schemas.microsoft.com/office/drawing/2010/main" w="9525">
+                <a14:hiddenLine xmlns:a14="http://schemas.microsoft.com/office/drawing/2010/main" xmlns="" w="9525">
                   <a:solidFill>
                     <a:srgbClr val="000000"/>
                   </a:solidFill>
@@ -2781,7 +2081,7 @@
             </a:ln>
             <a:extLst>
               <a:ext uri="{91240B29-F687-4f45-9708-019B960494DF}">
-                <a14:hiddenLine xmlns="" xmlns:a14="http://schemas.microsoft.com/office/drawing/2010/main" w="9525">
+                <a14:hiddenLine xmlns:a14="http://schemas.microsoft.com/office/drawing/2010/main" xmlns="" w="9525">
                   <a:solidFill>
                     <a:srgbClr val="000000"/>
                   </a:solidFill>
@@ -2850,7 +2150,7 @@
             </a:ln>
             <a:extLst>
               <a:ext uri="{91240B29-F687-4f45-9708-019B960494DF}">
-                <a14:hiddenLine xmlns="" xmlns:a14="http://schemas.microsoft.com/office/drawing/2010/main" w="9525">
+                <a14:hiddenLine xmlns:a14="http://schemas.microsoft.com/office/drawing/2010/main" xmlns="" w="9525">
                   <a:solidFill>
                     <a:srgbClr val="000000"/>
                   </a:solidFill>
@@ -2947,7 +2247,7 @@
             </a:ln>
             <a:extLst>
               <a:ext uri="{91240B29-F687-4f45-9708-019B960494DF}">
-                <a14:hiddenLine xmlns="" xmlns:a14="http://schemas.microsoft.com/office/drawing/2010/main" w="9525">
+                <a14:hiddenLine xmlns:a14="http://schemas.microsoft.com/office/drawing/2010/main" xmlns="" w="9525">
                   <a:solidFill>
                     <a:srgbClr val="000000"/>
                   </a:solidFill>
@@ -3044,7 +2344,7 @@
             </a:ln>
             <a:extLst>
               <a:ext uri="{91240B29-F687-4f45-9708-019B960494DF}">
-                <a14:hiddenLine xmlns="" xmlns:a14="http://schemas.microsoft.com/office/drawing/2010/main" w="9525">
+                <a14:hiddenLine xmlns:a14="http://schemas.microsoft.com/office/drawing/2010/main" xmlns="" w="9525">
                   <a:solidFill>
                     <a:srgbClr val="000000"/>
                   </a:solidFill>
@@ -3107,7 +2407,7 @@
             </a:ln>
             <a:extLst>
               <a:ext uri="{91240B29-F687-4f45-9708-019B960494DF}">
-                <a14:hiddenLine xmlns="" xmlns:a14="http://schemas.microsoft.com/office/drawing/2010/main" w="9525">
+                <a14:hiddenLine xmlns:a14="http://schemas.microsoft.com/office/drawing/2010/main" xmlns="" w="9525">
                   <a:solidFill>
                     <a:srgbClr val="000000"/>
                   </a:solidFill>
@@ -3204,7 +2504,7 @@
             </a:ln>
             <a:extLst>
               <a:ext uri="{91240B29-F687-4f45-9708-019B960494DF}">
-                <a14:hiddenLine xmlns="" xmlns:a14="http://schemas.microsoft.com/office/drawing/2010/main" w="9525">
+                <a14:hiddenLine xmlns:a14="http://schemas.microsoft.com/office/drawing/2010/main" xmlns="" w="9525">
                   <a:solidFill>
                     <a:srgbClr val="000000"/>
                   </a:solidFill>
@@ -3267,7 +2567,7 @@
             </a:ln>
             <a:extLst>
               <a:ext uri="{91240B29-F687-4f45-9708-019B960494DF}">
-                <a14:hiddenLine xmlns="" xmlns:a14="http://schemas.microsoft.com/office/drawing/2010/main" w="9525">
+                <a14:hiddenLine xmlns:a14="http://schemas.microsoft.com/office/drawing/2010/main" xmlns="" w="9525">
                   <a:solidFill>
                     <a:srgbClr val="000000"/>
                   </a:solidFill>
@@ -3364,7 +2664,7 @@
             </a:ln>
             <a:extLst>
               <a:ext uri="{91240B29-F687-4f45-9708-019B960494DF}">
-                <a14:hiddenLine xmlns="" xmlns:a14="http://schemas.microsoft.com/office/drawing/2010/main" w="9525">
+                <a14:hiddenLine xmlns:a14="http://schemas.microsoft.com/office/drawing/2010/main" xmlns="" w="9525">
                   <a:solidFill>
                     <a:srgbClr val="000000"/>
                   </a:solidFill>
@@ -3439,7 +2739,7 @@
             </a:ln>
             <a:extLst>
               <a:ext uri="{91240B29-F687-4f45-9708-019B960494DF}">
-                <a14:hiddenLine xmlns="" xmlns:a14="http://schemas.microsoft.com/office/drawing/2010/main" w="9525">
+                <a14:hiddenLine xmlns:a14="http://schemas.microsoft.com/office/drawing/2010/main" xmlns="" w="9525">
                   <a:solidFill>
                     <a:srgbClr val="000000"/>
                   </a:solidFill>
@@ -3536,7 +2836,7 @@
             </a:ln>
             <a:extLst>
               <a:ext uri="{91240B29-F687-4f45-9708-019B960494DF}">
-                <a14:hiddenLine xmlns="" xmlns:a14="http://schemas.microsoft.com/office/drawing/2010/main" w="9525">
+                <a14:hiddenLine xmlns:a14="http://schemas.microsoft.com/office/drawing/2010/main" xmlns="" w="9525">
                   <a:solidFill>
                     <a:srgbClr val="000000"/>
                   </a:solidFill>
@@ -3611,7 +2911,7 @@
             </a:ln>
             <a:extLst>
               <a:ext uri="{91240B29-F687-4f45-9708-019B960494DF}">
-                <a14:hiddenLine xmlns="" xmlns:a14="http://schemas.microsoft.com/office/drawing/2010/main" w="9525">
+                <a14:hiddenLine xmlns:a14="http://schemas.microsoft.com/office/drawing/2010/main" xmlns="" w="9525">
                   <a:solidFill>
                     <a:srgbClr val="000000"/>
                   </a:solidFill>
@@ -3708,7 +3008,7 @@
             </a:ln>
             <a:extLst>
               <a:ext uri="{91240B29-F687-4f45-9708-019B960494DF}">
-                <a14:hiddenLine xmlns="" xmlns:a14="http://schemas.microsoft.com/office/drawing/2010/main" w="9525">
+                <a14:hiddenLine xmlns:a14="http://schemas.microsoft.com/office/drawing/2010/main" xmlns="" w="9525">
                   <a:solidFill>
                     <a:srgbClr val="000000"/>
                   </a:solidFill>
@@ -3749,7 +3049,7 @@
             </a:ln>
             <a:extLst>
               <a:ext uri="{91240B29-F687-4f45-9708-019B960494DF}">
-                <a14:hiddenLine xmlns="" xmlns:a14="http://schemas.microsoft.com/office/drawing/2010/main" w="9525">
+                <a14:hiddenLine xmlns:a14="http://schemas.microsoft.com/office/drawing/2010/main" xmlns="" w="9525">
                   <a:solidFill>
                     <a:srgbClr val="000000"/>
                   </a:solidFill>
@@ -3846,7 +3146,7 @@
             </a:ln>
             <a:extLst>
               <a:ext uri="{91240B29-F687-4f45-9708-019B960494DF}">
-                <a14:hiddenLine xmlns="" xmlns:a14="http://schemas.microsoft.com/office/drawing/2010/main" w="9525">
+                <a14:hiddenLine xmlns:a14="http://schemas.microsoft.com/office/drawing/2010/main" xmlns="" w="9525">
                   <a:solidFill>
                     <a:srgbClr val="000000"/>
                   </a:solidFill>
@@ -3915,7 +3215,7 @@
             </a:ln>
             <a:extLst>
               <a:ext uri="{91240B29-F687-4f45-9708-019B960494DF}">
-                <a14:hiddenLine xmlns="" xmlns:a14="http://schemas.microsoft.com/office/drawing/2010/main" w="9525">
+                <a14:hiddenLine xmlns:a14="http://schemas.microsoft.com/office/drawing/2010/main" xmlns="" w="9525">
                   <a:solidFill>
                     <a:srgbClr val="000000"/>
                   </a:solidFill>
@@ -3984,7 +3284,7 @@
             </a:ln>
             <a:extLst>
               <a:ext uri="{91240B29-F687-4f45-9708-019B960494DF}">
-                <a14:hiddenLine xmlns="" xmlns:a14="http://schemas.microsoft.com/office/drawing/2010/main" w="9525">
+                <a14:hiddenLine xmlns:a14="http://schemas.microsoft.com/office/drawing/2010/main" xmlns="" w="9525">
                   <a:solidFill>
                     <a:srgbClr val="000000"/>
                   </a:solidFill>
@@ -4081,7 +3381,7 @@
             </a:ln>
             <a:extLst>
               <a:ext uri="{91240B29-F687-4f45-9708-019B960494DF}">
-                <a14:hiddenLine xmlns="" xmlns:a14="http://schemas.microsoft.com/office/drawing/2010/main" w="9525">
+                <a14:hiddenLine xmlns:a14="http://schemas.microsoft.com/office/drawing/2010/main" xmlns="" w="9525">
                   <a:solidFill>
                     <a:srgbClr val="000000"/>
                   </a:solidFill>
@@ -4156,7 +3456,7 @@
             </a:ln>
             <a:extLst>
               <a:ext uri="{91240B29-F687-4f45-9708-019B960494DF}">
-                <a14:hiddenLine xmlns="" xmlns:a14="http://schemas.microsoft.com/office/drawing/2010/main" w="9525">
+                <a14:hiddenLine xmlns:a14="http://schemas.microsoft.com/office/drawing/2010/main" xmlns="" w="9525">
                   <a:solidFill>
                     <a:srgbClr val="000000"/>
                   </a:solidFill>
@@ -4225,7 +3525,7 @@
             </a:ln>
             <a:extLst>
               <a:ext uri="{91240B29-F687-4f45-9708-019B960494DF}">
-                <a14:hiddenLine xmlns="" xmlns:a14="http://schemas.microsoft.com/office/drawing/2010/main" w="9525">
+                <a14:hiddenLine xmlns:a14="http://schemas.microsoft.com/office/drawing/2010/main" xmlns="" w="9525">
                   <a:solidFill>
                     <a:srgbClr val="000000"/>
                   </a:solidFill>
@@ -4322,7 +3622,7 @@
             </a:ln>
             <a:extLst>
               <a:ext uri="{91240B29-F687-4f45-9708-019B960494DF}">
-                <a14:hiddenLine xmlns="" xmlns:a14="http://schemas.microsoft.com/office/drawing/2010/main" w="9525">
+                <a14:hiddenLine xmlns:a14="http://schemas.microsoft.com/office/drawing/2010/main" xmlns="" w="9525">
                   <a:solidFill>
                     <a:srgbClr val="000000"/>
                   </a:solidFill>
@@ -4391,7 +3691,7 @@
             </a:ln>
             <a:extLst>
               <a:ext uri="{91240B29-F687-4f45-9708-019B960494DF}">
-                <a14:hiddenLine xmlns="" xmlns:a14="http://schemas.microsoft.com/office/drawing/2010/main" w="9525">
+                <a14:hiddenLine xmlns:a14="http://schemas.microsoft.com/office/drawing/2010/main" xmlns="" w="9525">
                   <a:solidFill>
                     <a:srgbClr val="000000"/>
                   </a:solidFill>
@@ -4488,7 +3788,7 @@
             </a:ln>
             <a:extLst>
               <a:ext uri="{91240B29-F687-4f45-9708-019B960494DF}">
-                <a14:hiddenLine xmlns="" xmlns:a14="http://schemas.microsoft.com/office/drawing/2010/main" w="9525">
+                <a14:hiddenLine xmlns:a14="http://schemas.microsoft.com/office/drawing/2010/main" xmlns="" w="9525">
                   <a:solidFill>
                     <a:srgbClr val="000000"/>
                   </a:solidFill>
@@ -4557,7 +3857,7 @@
             </a:ln>
             <a:extLst>
               <a:ext uri="{91240B29-F687-4f45-9708-019B960494DF}">
-                <a14:hiddenLine xmlns="" xmlns:a14="http://schemas.microsoft.com/office/drawing/2010/main" w="9525">
+                <a14:hiddenLine xmlns:a14="http://schemas.microsoft.com/office/drawing/2010/main" xmlns="" w="9525">
                   <a:solidFill>
                     <a:srgbClr val="000000"/>
                   </a:solidFill>
@@ -4654,7 +3954,7 @@
             </a:ln>
             <a:extLst>
               <a:ext uri="{91240B29-F687-4f45-9708-019B960494DF}">
-                <a14:hiddenLine xmlns="" xmlns:a14="http://schemas.microsoft.com/office/drawing/2010/main" w="9525">
+                <a14:hiddenLine xmlns:a14="http://schemas.microsoft.com/office/drawing/2010/main" xmlns="" w="9525">
                   <a:solidFill>
                     <a:srgbClr val="000000"/>
                   </a:solidFill>
@@ -4695,7 +3995,7 @@
             </a:ln>
             <a:extLst>
               <a:ext uri="{91240B29-F687-4f45-9708-019B960494DF}">
-                <a14:hiddenLine xmlns="" xmlns:a14="http://schemas.microsoft.com/office/drawing/2010/main" w="9525">
+                <a14:hiddenLine xmlns:a14="http://schemas.microsoft.com/office/drawing/2010/main" xmlns="" w="9525">
                   <a:solidFill>
                     <a:srgbClr val="000000"/>
                   </a:solidFill>
@@ -4767,7 +4067,7 @@
             </a:ln>
             <a:extLst>
               <a:ext uri="{91240B29-F687-4f45-9708-019B960494DF}">
-                <a14:hiddenLine xmlns="" xmlns:a14="http://schemas.microsoft.com/office/drawing/2010/main" w="9525">
+                <a14:hiddenLine xmlns:a14="http://schemas.microsoft.com/office/drawing/2010/main" xmlns="" w="9525">
                   <a:solidFill>
                     <a:srgbClr val="000000"/>
                   </a:solidFill>
@@ -4864,7 +4164,7 @@
             </a:ln>
             <a:extLst>
               <a:ext uri="{91240B29-F687-4f45-9708-019B960494DF}">
-                <a14:hiddenLine xmlns="" xmlns:a14="http://schemas.microsoft.com/office/drawing/2010/main" w="9525">
+                <a14:hiddenLine xmlns:a14="http://schemas.microsoft.com/office/drawing/2010/main" xmlns="" w="9525">
                   <a:solidFill>
                     <a:srgbClr val="000000"/>
                   </a:solidFill>
@@ -4933,7 +4233,7 @@
             </a:ln>
             <a:extLst>
               <a:ext uri="{91240B29-F687-4f45-9708-019B960494DF}">
-                <a14:hiddenLine xmlns="" xmlns:a14="http://schemas.microsoft.com/office/drawing/2010/main" w="9525">
+                <a14:hiddenLine xmlns:a14="http://schemas.microsoft.com/office/drawing/2010/main" xmlns="" w="9525">
                   <a:solidFill>
                     <a:srgbClr val="000000"/>
                   </a:solidFill>
@@ -5030,7 +4330,7 @@
             </a:ln>
             <a:extLst>
               <a:ext uri="{91240B29-F687-4f45-9708-019B960494DF}">
-                <a14:hiddenLine xmlns="" xmlns:a14="http://schemas.microsoft.com/office/drawing/2010/main" w="9525">
+                <a14:hiddenLine xmlns:a14="http://schemas.microsoft.com/office/drawing/2010/main" xmlns="" w="9525">
                   <a:solidFill>
                     <a:srgbClr val="000000"/>
                   </a:solidFill>
@@ -5127,7 +4427,7 @@
             </a:ln>
             <a:extLst>
               <a:ext uri="{91240B29-F687-4f45-9708-019B960494DF}">
-                <a14:hiddenLine xmlns="" xmlns:a14="http://schemas.microsoft.com/office/drawing/2010/main" w="9525">
+                <a14:hiddenLine xmlns:a14="http://schemas.microsoft.com/office/drawing/2010/main" xmlns="" w="9525">
                   <a:solidFill>
                     <a:srgbClr val="000000"/>
                   </a:solidFill>
@@ -5199,7 +4499,7 @@
             </a:ln>
             <a:extLst>
               <a:ext uri="{91240B29-F687-4f45-9708-019B960494DF}">
-                <a14:hiddenLine xmlns="" xmlns:a14="http://schemas.microsoft.com/office/drawing/2010/main" w="9525">
+                <a14:hiddenLine xmlns:a14="http://schemas.microsoft.com/office/drawing/2010/main" xmlns="" w="9525">
                   <a:solidFill>
                     <a:srgbClr val="000000"/>
                   </a:solidFill>
@@ -5268,7 +4568,7 @@
             </a:ln>
             <a:extLst>
               <a:ext uri="{91240B29-F687-4f45-9708-019B960494DF}">
-                <a14:hiddenLine xmlns="" xmlns:a14="http://schemas.microsoft.com/office/drawing/2010/main" w="9525">
+                <a14:hiddenLine xmlns:a14="http://schemas.microsoft.com/office/drawing/2010/main" xmlns="" w="9525">
                   <a:solidFill>
                     <a:srgbClr val="000000"/>
                   </a:solidFill>
@@ -5365,7 +4665,7 @@
             </a:ln>
             <a:extLst>
               <a:ext uri="{91240B29-F687-4f45-9708-019B960494DF}">
-                <a14:hiddenLine xmlns="" xmlns:a14="http://schemas.microsoft.com/office/drawing/2010/main" w="9525">
+                <a14:hiddenLine xmlns:a14="http://schemas.microsoft.com/office/drawing/2010/main" xmlns="" w="9525">
                   <a:solidFill>
                     <a:srgbClr val="000000"/>
                   </a:solidFill>
@@ -5462,7 +4762,7 @@
             </a:ln>
             <a:extLst>
               <a:ext uri="{91240B29-F687-4f45-9708-019B960494DF}">
-                <a14:hiddenLine xmlns="" xmlns:a14="http://schemas.microsoft.com/office/drawing/2010/main" w="9525">
+                <a14:hiddenLine xmlns:a14="http://schemas.microsoft.com/office/drawing/2010/main" xmlns="" w="9525">
                   <a:solidFill>
                     <a:srgbClr val="000000"/>
                   </a:solidFill>
@@ -5531,7 +4831,7 @@
             </a:ln>
             <a:extLst>
               <a:ext uri="{91240B29-F687-4f45-9708-019B960494DF}">
-                <a14:hiddenLine xmlns="" xmlns:a14="http://schemas.microsoft.com/office/drawing/2010/main" w="9525">
+                <a14:hiddenLine xmlns:a14="http://schemas.microsoft.com/office/drawing/2010/main" xmlns="" w="9525">
                   <a:solidFill>
                     <a:srgbClr val="000000"/>
                   </a:solidFill>
@@ -5658,7 +4958,7 @@
             </a:ln>
             <a:extLst>
               <a:ext uri="{91240B29-F687-4f45-9708-019B960494DF}">
-                <a14:hiddenLine xmlns="" xmlns:a14="http://schemas.microsoft.com/office/drawing/2010/main" w="9525">
+                <a14:hiddenLine xmlns:a14="http://schemas.microsoft.com/office/drawing/2010/main" xmlns="" w="9525">
                   <a:solidFill>
                     <a:srgbClr val="000000"/>
                   </a:solidFill>
@@ -5733,7 +5033,7 @@
             </a:ln>
             <a:extLst>
               <a:ext uri="{91240B29-F687-4f45-9708-019B960494DF}">
-                <a14:hiddenLine xmlns="" xmlns:a14="http://schemas.microsoft.com/office/drawing/2010/main" w="9525">
+                <a14:hiddenLine xmlns:a14="http://schemas.microsoft.com/office/drawing/2010/main" xmlns="" w="9525">
                   <a:solidFill>
                     <a:srgbClr val="000000"/>
                   </a:solidFill>
@@ -5830,7 +5130,7 @@
             </a:ln>
             <a:extLst>
               <a:ext uri="{91240B29-F687-4f45-9708-019B960494DF}">
-                <a14:hiddenLine xmlns="" xmlns:a14="http://schemas.microsoft.com/office/drawing/2010/main" w="9525">
+                <a14:hiddenLine xmlns:a14="http://schemas.microsoft.com/office/drawing/2010/main" xmlns="" w="9525">
                   <a:solidFill>
                     <a:srgbClr val="000000"/>
                   </a:solidFill>
@@ -5980,7 +5280,7 @@
           <a:p>
             <a:fld id="{48A87A34-81AB-432B-8DAE-1953F412C126}" type="datetimeFigureOut">
               <a:rPr lang="en-US" dirty="0"/>
-              <a:t>11/19/2025</a:t>
+              <a:t>10/18/26</a:t>
             </a:fld>
             <a:endParaRPr lang="en-US" dirty="0"/>
           </a:p>
@@ -6256,7 +5556,7 @@
           <a:p>
             <a:fld id="{48A87A34-81AB-432B-8DAE-1953F412C126}" type="datetimeFigureOut">
               <a:rPr lang="en-US" dirty="0"/>
-              <a:t>11/19/2025</a:t>
+              <a:t>10/18/26</a:t>
             </a:fld>
             <a:endParaRPr lang="en-US" dirty="0"/>
           </a:p>
@@ -6471,7 +5771,7 @@
           <a:p>
             <a:fld id="{48A87A34-81AB-432B-8DAE-1953F412C126}" type="datetimeFigureOut">
               <a:rPr lang="en-US" dirty="0"/>
-              <a:t>11/19/2025</a:t>
+              <a:t>10/18/26</a:t>
             </a:fld>
             <a:endParaRPr lang="en-US" dirty="0"/>
           </a:p>
@@ -6753,7 +6053,7 @@
           <a:p>
             <a:fld id="{48A87A34-81AB-432B-8DAE-1953F412C126}" type="datetimeFigureOut">
               <a:rPr lang="en-US" dirty="0"/>
-              <a:t>11/19/2025</a:t>
+              <a:t>10/18/26</a:t>
             </a:fld>
             <a:endParaRPr lang="en-US" dirty="0"/>
           </a:p>
@@ -7206,7 +6506,7 @@
           <a:p>
             <a:fld id="{48A87A34-81AB-432B-8DAE-1953F412C126}" type="datetimeFigureOut">
               <a:rPr lang="en-US" dirty="0"/>
-              <a:t>11/19/2025</a:t>
+              <a:t>10/18/26</a:t>
             </a:fld>
             <a:endParaRPr lang="en-US" dirty="0"/>
           </a:p>
@@ -7771,7 +7071,7 @@
           <a:p>
             <a:fld id="{48A87A34-81AB-432B-8DAE-1953F412C126}" type="datetimeFigureOut">
               <a:rPr lang="en-US" dirty="0"/>
-              <a:t>11/19/2025</a:t>
+              <a:t>10/18/26</a:t>
             </a:fld>
             <a:endParaRPr lang="en-US" dirty="0"/>
           </a:p>
@@ -8510,7 +7810,7 @@
           <a:p>
             <a:fld id="{48A87A34-81AB-432B-8DAE-1953F412C126}" type="datetimeFigureOut">
               <a:rPr lang="en-US" dirty="0"/>
-              <a:t>11/19/2025</a:t>
+              <a:t>10/18/26</a:t>
             </a:fld>
             <a:endParaRPr lang="en-US" dirty="0"/>
           </a:p>
@@ -8699,7 +7999,7 @@
           <a:p>
             <a:fld id="{48A87A34-81AB-432B-8DAE-1953F412C126}" type="datetimeFigureOut">
               <a:rPr lang="en-US" dirty="0"/>
-              <a:t>11/19/2025</a:t>
+              <a:t>10/18/26</a:t>
             </a:fld>
             <a:endParaRPr lang="en-US" dirty="0"/>
           </a:p>
@@ -8898,7 +8198,7 @@
           <a:p>
             <a:fld id="{48A87A34-81AB-432B-8DAE-1953F412C126}" type="datetimeFigureOut">
               <a:rPr lang="en-US" dirty="0"/>
-              <a:t>11/19/2025</a:t>
+              <a:t>10/18/26</a:t>
             </a:fld>
             <a:endParaRPr lang="en-US" dirty="0"/>
           </a:p>
@@ -9087,7 +8387,7 @@
           <a:p>
             <a:fld id="{48A87A34-81AB-432B-8DAE-1953F412C126}" type="datetimeFigureOut">
               <a:rPr lang="en-US" dirty="0"/>
-              <a:t>11/19/2025</a:t>
+              <a:t>10/18/26</a:t>
             </a:fld>
             <a:endParaRPr lang="en-US" dirty="0"/>
           </a:p>
@@ -9356,7 +8656,7 @@
           <a:p>
             <a:fld id="{48A87A34-81AB-432B-8DAE-1953F412C126}" type="datetimeFigureOut">
               <a:rPr lang="en-US" dirty="0"/>
-              <a:t>11/19/2025</a:t>
+              <a:t>10/18/26</a:t>
             </a:fld>
             <a:endParaRPr lang="en-US" dirty="0"/>
           </a:p>
@@ -9607,7 +8907,7 @@
           <a:p>
             <a:fld id="{48A87A34-81AB-432B-8DAE-1953F412C126}" type="datetimeFigureOut">
               <a:rPr lang="en-US" dirty="0"/>
-              <a:t>11/19/2025</a:t>
+              <a:t>10/18/26</a:t>
             </a:fld>
             <a:endParaRPr lang="en-US" dirty="0"/>
           </a:p>
@@ -10007,7 +9307,7 @@
           <a:p>
             <a:fld id="{48A87A34-81AB-432B-8DAE-1953F412C126}" type="datetimeFigureOut">
               <a:rPr lang="en-US" dirty="0"/>
-              <a:t>11/19/2025</a:t>
+              <a:t>10/18/26</a:t>
             </a:fld>
             <a:endParaRPr lang="en-US" dirty="0"/>
           </a:p>
@@ -10144,7 +9444,7 @@
           <a:p>
             <a:fld id="{48A87A34-81AB-432B-8DAE-1953F412C126}" type="datetimeFigureOut">
               <a:rPr lang="en-US" dirty="0"/>
-              <a:t>11/19/2025</a:t>
+              <a:t>10/18/26</a:t>
             </a:fld>
             <a:endParaRPr lang="en-US" dirty="0"/>
           </a:p>
@@ -10258,7 +9558,7 @@
           <a:p>
             <a:fld id="{48A87A34-81AB-432B-8DAE-1953F412C126}" type="datetimeFigureOut">
               <a:rPr lang="en-US" dirty="0"/>
-              <a:t>11/19/2025</a:t>
+              <a:t>10/18/26</a:t>
             </a:fld>
             <a:endParaRPr lang="en-US" dirty="0"/>
           </a:p>
@@ -10526,7 +9826,7 @@
           <a:p>
             <a:fld id="{48A87A34-81AB-432B-8DAE-1953F412C126}" type="datetimeFigureOut">
               <a:rPr lang="en-US" dirty="0"/>
-              <a:t>11/19/2025</a:t>
+              <a:t>10/18/26</a:t>
             </a:fld>
             <a:endParaRPr lang="en-US" dirty="0"/>
           </a:p>
@@ -10825,7 +10125,7 @@
           <a:p>
             <a:fld id="{48A87A34-81AB-432B-8DAE-1953F412C126}" type="datetimeFigureOut">
               <a:rPr lang="en-US" dirty="0"/>
-              <a:t>11/19/2025</a:t>
+              <a:t>10/18/26</a:t>
             </a:fld>
             <a:endParaRPr lang="en-US" dirty="0"/>
           </a:p>
@@ -17842,6 +17142,57 @@
           </a:p>
         </p:txBody>
       </p:sp>
+      <mc:AlternateContent xmlns:mc="http://schemas.openxmlformats.org/markup-compatibility/2006">
+        <mc:Choice xmlns:p14="http://schemas.microsoft.com/office/powerpoint/2010/main" Requires="p14">
+          <p:contentPart p14:bwMode="auto" r:id="rId2">
+            <p14:nvContentPartPr>
+              <p14:cNvPr id="2" name="Ink 1">
+                <a:extLst>
+                  <a:ext uri="{FF2B5EF4-FFF2-40B4-BE49-F238E27FC236}">
+                    <a16:creationId xmlns:a16="http://schemas.microsoft.com/office/drawing/2014/main" id="{BB9ADFB3-56A3-A6BE-A46E-32CFA395060D}"/>
+                  </a:ext>
+                </a:extLst>
+              </p14:cNvPr>
+              <p14:cNvContentPartPr/>
+              <p14:nvPr/>
+            </p14:nvContentPartPr>
+            <p14:xfrm>
+              <a:off x="2000880" y="1994400"/>
+              <a:ext cx="2607120" cy="1780200"/>
+            </p14:xfrm>
+          </p:contentPart>
+        </mc:Choice>
+        <mc:Fallback>
+          <p:pic>
+            <p:nvPicPr>
+              <p:cNvPr id="2" name="Ink 1">
+                <a:extLst>
+                  <a:ext uri="{FF2B5EF4-FFF2-40B4-BE49-F238E27FC236}">
+                    <a16:creationId xmlns:a16="http://schemas.microsoft.com/office/drawing/2014/main" id="{BB9ADFB3-56A3-A6BE-A46E-32CFA395060D}"/>
+                  </a:ext>
+                </a:extLst>
+              </p:cNvPr>
+              <p:cNvPicPr/>
+              <p:nvPr/>
+            </p:nvPicPr>
+            <p:blipFill>
+              <a:blip r:embed="rId3"/>
+              <a:stretch>
+                <a:fillRect/>
+              </a:stretch>
+            </p:blipFill>
+            <p:spPr>
+              <a:xfrm>
+                <a:off x="1984680" y="1978200"/>
+                <a:ext cx="2639520" cy="1812600"/>
+              </a:xfrm>
+              <a:prstGeom prst="rect">
+                <a:avLst/>
+              </a:prstGeom>
+            </p:spPr>
+          </p:pic>
+        </mc:Fallback>
+      </mc:AlternateContent>
     </p:spTree>
     <p:extLst>
       <p:ext uri="{BB962C8B-B14F-4D97-AF65-F5344CB8AC3E}">
